--- a/deliverables/video-3-slides/out/Video-3-Reveal-Builds_v1.1.pptx
+++ b/deliverables/video-3-slides/out/Video-3-Reveal-Builds_v1.1.pptx
@@ -6703,7 +6703,7 @@
                 <a:ea typeface="Montserrat"/>
                 <a:cs typeface="Montserrat"/>
               </a:rPr>
-              <a:t>Before You Quit</a:t>
+              <a:t>3 Things to Do</a:t>
             </a:r>
             <a:br/>
             <a:r>
@@ -6715,7 +6715,7 @@
                 <a:ea typeface="Montserrat"/>
                 <a:cs typeface="Montserrat"/>
               </a:rPr>
-              <a:t>Your Job, Check</a:t>
+              <a:t>Before Quitting</a:t>
             </a:r>
             <a:br/>
             <a:r>
@@ -6727,7 +6727,7 @@
                 <a:ea typeface="Montserrat"/>
                 <a:cs typeface="Montserrat"/>
               </a:rPr>
-              <a:t>These 3 Things</a:t>
+              <a:t>Your Job</a:t>
             </a:r>
           </a:p>
         </p:txBody>

--- a/deliverables/video-3-slides/out/Video-3-Reveal-Builds_v1.1.pptx
+++ b/deliverables/video-3-slides/out/Video-3-Reveal-Builds_v1.1.pptx
@@ -528,62 +528,27 @@
           <a:lstStyle/>
           <a:p>
             <a:r>
-              <a:t>Timing: 0:00-0:50</a:t>
-            </a:r>
-          </a:p>
-          <a:p/>
-          <a:p>
-            <a:r>
-              <a:t>Begin full-screen on Temidayo, not on this slide.</a:t>
-            </a:r>
-          </a:p>
-          <a:p/>
-          <a:p>
-            <a:r>
-              <a:t>Open on the decision the viewer is already carrying: growth has stopped, the</a:t>
-            </a:r>
-          </a:p>
-          <a:p>
-            <a:r>
-              <a:t>conditions changed, another opportunity appeared, or the role no longer looks</a:t>
-            </a:r>
-          </a:p>
-          <a:p>
-            <a:r>
-              <a:t>like the right place to stay.</a:t>
-            </a:r>
-          </a:p>
-          <a:p/>
-          <a:p>
-            <a:r>
-              <a:t>Give the payoff before the title appears. By the end they will know what</a:t>
-            </a:r>
-          </a:p>
-          <a:p>
-            <a:r>
-              <a:t>evidence to preserve before access changes, how to name what the work built,</a:t>
-            </a:r>
-          </a:p>
-          <a:p>
-            <a:r>
-              <a:t>and how to test whether the next move uses something proven while requiring</a:t>
-            </a:r>
-          </a:p>
-          <a:p>
-            <a:r>
-              <a:t>something genuinely new.</a:t>
-            </a:r>
-          </a:p>
-          <a:p/>
-          <a:p>
-            <a:r>
-              <a:t>Then the brief channel line, then the title slide.</a:t>
-            </a:r>
-          </a:p>
-          <a:p/>
-          <a:p>
-            <a:r>
-              <a:t>Do not make the opening alarmist and do not talk anyone out of leaving.</a:t>
+              <a:t>Single-state frame — main slide 1.</a:t>
+            </a:r>
+          </a:p>
+          <a:p>
+            <a:r>
+              <a:t>Timing: approximately 0:37 to 0:55.</a:t>
+            </a:r>
+          </a:p>
+          <a:p>
+            <a:r>
+              <a:t>Do NOT open on this slide. Begin full-screen on Temidayo and let the opening land first: the hook, the three-check promise, her own perspective on documented performance and talent systems, and the safety line.</a:t>
+            </a:r>
+          </a:p>
+          <a:p>
+            <a:r>
+              <a:t>Bring the title up under the channel line: "I'm Temidayo Afonja. I help experienced professionals understand what they can carry from their work into whatever comes next, without assuming they have to start from zero. And that is what I want to help you do before you hand in your notice."</a:t>
+            </a:r>
+          </a:p>
+          <a:p>
+            <a:r>
+              <a:t>That second sentence is the turn from positioning to relationship. Stay on her face for it.</a:t>
             </a:r>
           </a:p>
         </p:txBody>
@@ -653,50 +618,32 @@
           <a:lstStyle/>
           <a:p>
             <a:r>
-              <a:t>Timing: 3:23-4:55</a:t>
-            </a:r>
-          </a:p>
-          <a:p/>
-          <a:p>
-            <a:r>
-              <a:t>Speak from ideas. Reveal one row at a time, then the closing question.</a:t>
-            </a:r>
-          </a:p>
-          <a:p/>
-          <a:p>
-            <a:r>
-              <a:t>Use the generic example. Someone may have reduced the time an internal process</a:t>
-            </a:r>
-          </a:p>
-          <a:p>
-            <a:r>
-              <a:t>took. The portable value is usually not the number. It is the ability to</a:t>
-            </a:r>
-          </a:p>
-          <a:p>
-            <a:r>
-              <a:t>identify where work was getting stuck, align people who owned different parts</a:t>
-            </a:r>
-          </a:p>
-          <a:p>
-            <a:r>
-              <a:t>of the system, redesign the handoff, and do it without creating a new control</a:t>
-            </a:r>
-          </a:p>
-          <a:p>
-            <a:r>
-              <a:t>failure.</a:t>
-            </a:r>
-          </a:p>
-          <a:p/>
-          <a:p>
-            <a:r>
-              <a:t>That combination is what another organization can use. Do not invent</a:t>
-            </a:r>
-          </a:p>
-          <a:p>
-            <a:r>
-              <a:t>statistics; the shape of the judgment is the evidence.</a:t>
+              <a:t>Reveal frame 2 of 5 — main slide 6.</a:t>
+            </a:r>
+          </a:p>
+          <a:p>
+            <a:r>
+              <a:t>Timing: approximately 3:12.</a:t>
+            </a:r>
+          </a:p>
+          <a:p>
+            <a:r>
+              <a:t>Reveal the four prompts one at a time as each is named.</a:t>
+            </a:r>
+          </a:p>
+          <a:p>
+            <a:r>
+              <a:t>Note the direct-address framing in v3.0: Temidayo says "Say you tell me: 'I reduced the amount of time an internal process took.' That gives me an outcome." She is standing in as the listener across the table, and the example is then turned back on the viewer — "what you may have actually learned to do was…". Keep her on camera through that exchange so it reads as a conversation, not a case study.</a:t>
+            </a:r>
+          </a:p>
+          <a:p>
+            <a:r>
+              <a:t>The example stays generic. No employer, client, system, metric or result.</a:t>
+            </a:r>
+          </a:p>
+          <a:p>
+            <a:r>
+              <a:t>Close on the two questions she hands the viewer: what did your work prove you can now do, and where else could that be useful?</a:t>
             </a:r>
           </a:p>
         </p:txBody>
@@ -766,50 +713,32 @@
           <a:lstStyle/>
           <a:p>
             <a:r>
-              <a:t>Timing: 3:23-4:55</a:t>
-            </a:r>
-          </a:p>
-          <a:p/>
-          <a:p>
-            <a:r>
-              <a:t>Speak from ideas. Reveal one row at a time, then the closing question.</a:t>
-            </a:r>
-          </a:p>
-          <a:p/>
-          <a:p>
-            <a:r>
-              <a:t>Use the generic example. Someone may have reduced the time an internal process</a:t>
-            </a:r>
-          </a:p>
-          <a:p>
-            <a:r>
-              <a:t>took. The portable value is usually not the number. It is the ability to</a:t>
-            </a:r>
-          </a:p>
-          <a:p>
-            <a:r>
-              <a:t>identify where work was getting stuck, align people who owned different parts</a:t>
-            </a:r>
-          </a:p>
-          <a:p>
-            <a:r>
-              <a:t>of the system, redesign the handoff, and do it without creating a new control</a:t>
-            </a:r>
-          </a:p>
-          <a:p>
-            <a:r>
-              <a:t>failure.</a:t>
-            </a:r>
-          </a:p>
-          <a:p/>
-          <a:p>
-            <a:r>
-              <a:t>That combination is what another organization can use. Do not invent</a:t>
-            </a:r>
-          </a:p>
-          <a:p>
-            <a:r>
-              <a:t>statistics; the shape of the judgment is the evidence.</a:t>
+              <a:t>Reveal frame 3 of 5 — main slide 6.</a:t>
+            </a:r>
+          </a:p>
+          <a:p>
+            <a:r>
+              <a:t>Timing: approximately 3:12.</a:t>
+            </a:r>
+          </a:p>
+          <a:p>
+            <a:r>
+              <a:t>Reveal the four prompts one at a time as each is named.</a:t>
+            </a:r>
+          </a:p>
+          <a:p>
+            <a:r>
+              <a:t>Note the direct-address framing in v3.0: Temidayo says "Say you tell me: 'I reduced the amount of time an internal process took.' That gives me an outcome." She is standing in as the listener across the table, and the example is then turned back on the viewer — "what you may have actually learned to do was…". Keep her on camera through that exchange so it reads as a conversation, not a case study.</a:t>
+            </a:r>
+          </a:p>
+          <a:p>
+            <a:r>
+              <a:t>The example stays generic. No employer, client, system, metric or result.</a:t>
+            </a:r>
+          </a:p>
+          <a:p>
+            <a:r>
+              <a:t>Close on the two questions she hands the viewer: what did your work prove you can now do, and where else could that be useful?</a:t>
             </a:r>
           </a:p>
         </p:txBody>
@@ -879,50 +808,32 @@
           <a:lstStyle/>
           <a:p>
             <a:r>
-              <a:t>Timing: 3:23-4:55</a:t>
-            </a:r>
-          </a:p>
-          <a:p/>
-          <a:p>
-            <a:r>
-              <a:t>Speak from ideas. Reveal one row at a time, then the closing question.</a:t>
-            </a:r>
-          </a:p>
-          <a:p/>
-          <a:p>
-            <a:r>
-              <a:t>Use the generic example. Someone may have reduced the time an internal process</a:t>
-            </a:r>
-          </a:p>
-          <a:p>
-            <a:r>
-              <a:t>took. The portable value is usually not the number. It is the ability to</a:t>
-            </a:r>
-          </a:p>
-          <a:p>
-            <a:r>
-              <a:t>identify where work was getting stuck, align people who owned different parts</a:t>
-            </a:r>
-          </a:p>
-          <a:p>
-            <a:r>
-              <a:t>of the system, redesign the handoff, and do it without creating a new control</a:t>
-            </a:r>
-          </a:p>
-          <a:p>
-            <a:r>
-              <a:t>failure.</a:t>
-            </a:r>
-          </a:p>
-          <a:p/>
-          <a:p>
-            <a:r>
-              <a:t>That combination is what another organization can use. Do not invent</a:t>
-            </a:r>
-          </a:p>
-          <a:p>
-            <a:r>
-              <a:t>statistics; the shape of the judgment is the evidence.</a:t>
+              <a:t>Reveal frame 4 of 5 — main slide 6.</a:t>
+            </a:r>
+          </a:p>
+          <a:p>
+            <a:r>
+              <a:t>Timing: approximately 3:12.</a:t>
+            </a:r>
+          </a:p>
+          <a:p>
+            <a:r>
+              <a:t>Reveal the four prompts one at a time as each is named.</a:t>
+            </a:r>
+          </a:p>
+          <a:p>
+            <a:r>
+              <a:t>Note the direct-address framing in v3.0: Temidayo says "Say you tell me: 'I reduced the amount of time an internal process took.' That gives me an outcome." She is standing in as the listener across the table, and the example is then turned back on the viewer — "what you may have actually learned to do was…". Keep her on camera through that exchange so it reads as a conversation, not a case study.</a:t>
+            </a:r>
+          </a:p>
+          <a:p>
+            <a:r>
+              <a:t>The example stays generic. No employer, client, system, metric or result.</a:t>
+            </a:r>
+          </a:p>
+          <a:p>
+            <a:r>
+              <a:t>Close on the two questions she hands the viewer: what did your work prove you can now do, and where else could that be useful?</a:t>
             </a:r>
           </a:p>
         </p:txBody>
@@ -992,50 +903,32 @@
           <a:lstStyle/>
           <a:p>
             <a:r>
-              <a:t>Timing: 3:23-4:55</a:t>
-            </a:r>
-          </a:p>
-          <a:p/>
-          <a:p>
-            <a:r>
-              <a:t>Speak from ideas. Reveal one row at a time, then the closing question.</a:t>
-            </a:r>
-          </a:p>
-          <a:p/>
-          <a:p>
-            <a:r>
-              <a:t>Use the generic example. Someone may have reduced the time an internal process</a:t>
-            </a:r>
-          </a:p>
-          <a:p>
-            <a:r>
-              <a:t>took. The portable value is usually not the number. It is the ability to</a:t>
-            </a:r>
-          </a:p>
-          <a:p>
-            <a:r>
-              <a:t>identify where work was getting stuck, align people who owned different parts</a:t>
-            </a:r>
-          </a:p>
-          <a:p>
-            <a:r>
-              <a:t>of the system, redesign the handoff, and do it without creating a new control</a:t>
-            </a:r>
-          </a:p>
-          <a:p>
-            <a:r>
-              <a:t>failure.</a:t>
-            </a:r>
-          </a:p>
-          <a:p/>
-          <a:p>
-            <a:r>
-              <a:t>That combination is what another organization can use. Do not invent</a:t>
-            </a:r>
-          </a:p>
-          <a:p>
-            <a:r>
-              <a:t>statistics; the shape of the judgment is the evidence.</a:t>
+              <a:t>Reveal frame 5 of 5 — main slide 6.</a:t>
+            </a:r>
+          </a:p>
+          <a:p>
+            <a:r>
+              <a:t>Timing: approximately 3:12.</a:t>
+            </a:r>
+          </a:p>
+          <a:p>
+            <a:r>
+              <a:t>Reveal the four prompts one at a time as each is named.</a:t>
+            </a:r>
+          </a:p>
+          <a:p>
+            <a:r>
+              <a:t>Note the direct-address framing in v3.0: Temidayo says "Say you tell me: 'I reduced the amount of time an internal process took.' That gives me an outcome." She is standing in as the listener across the table, and the example is then turned back on the viewer — "what you may have actually learned to do was…". Keep her on camera through that exchange so it reads as a conversation, not a case study.</a:t>
+            </a:r>
+          </a:p>
+          <a:p>
+            <a:r>
+              <a:t>The example stays generic. No employer, client, system, metric or result.</a:t>
+            </a:r>
+          </a:p>
+          <a:p>
+            <a:r>
+              <a:t>Close on the two questions she hands the viewer: what did your work prove you can now do, and where else could that be useful?</a:t>
             </a:r>
           </a:p>
         </p:txBody>
@@ -1105,24 +998,17 @@
           <a:lstStyle/>
           <a:p>
             <a:r>
-              <a:t>Timing: 4:55-5:03</a:t>
-            </a:r>
-          </a:p>
-          <a:p/>
-          <a:p>
-            <a:r>
-              <a:t>A section break, four to seven seconds. Say: "The third check is to test the</a:t>
-            </a:r>
-          </a:p>
-          <a:p>
-            <a:r>
-              <a:t>next move."</a:t>
-            </a:r>
-          </a:p>
-          <a:p/>
-          <a:p>
-            <a:r>
-              <a:t>Do not restate the first two.</a:t>
+              <a:t>Single-state frame — main slide 7.</a:t>
+            </a:r>
+          </a:p>
+          <a:p>
+            <a:r>
+              <a:t>Timing: approximately 4:23, holding to about 4:27.</a:t>
+            </a:r>
+          </a:p>
+          <a:p>
+            <a:r>
+              <a:t>Section card. Hold briefly, then return to presenter.</a:t>
             </a:r>
           </a:p>
         </p:txBody>
@@ -1192,47 +1078,32 @@
           <a:lstStyle/>
           <a:p>
             <a:r>
-              <a:t>Timing: 5:03-6:30</a:t>
-            </a:r>
-          </a:p>
-          <a:p/>
-          <a:p>
-            <a:r>
-              <a:t>Speak from ideas. Hold the contrast, then reveal the questions one at a time.</a:t>
-            </a:r>
-          </a:p>
-          <a:p/>
-          <a:p>
-            <a:r>
-              <a:t>Two cautions, spoken rather than on the slide.</a:t>
-            </a:r>
-          </a:p>
-          <a:p/>
-          <a:p>
-            <a:r>
-              <a:t>A move that uses nothing you have already developed may impose an unnecessary</a:t>
-            </a:r>
-          </a:p>
-          <a:p>
-            <a:r>
-              <a:t>reset.</a:t>
-            </a:r>
-          </a:p>
-          <a:p/>
-          <a:p>
-            <a:r>
-              <a:t>And a move that simply repeats the same work at another employer may change</a:t>
-            </a:r>
-          </a:p>
-          <a:p>
-            <a:r>
-              <a:t>the scenery without changing your position.</a:t>
-            </a:r>
-          </a:p>
-          <a:p/>
-          <a:p>
-            <a:r>
-              <a:t>The move worth making usually does both things at once.</a:t>
+              <a:t>Reveal frame 1 of 4 — main slide 8.</a:t>
+            </a:r>
+          </a:p>
+          <a:p>
+            <a:r>
+              <a:t>Timing: approximately 4:27.</a:t>
+            </a:r>
+          </a:p>
+          <a:p>
+            <a:r>
+              <a:t>Reveal the two halves, then the three questions.</a:t>
+            </a:r>
+          </a:p>
+          <a:p>
+            <a:r>
+              <a:t>The two kinds of reset both need room. A deliberate learning curve can be a very good decision; the risk is repeating the same work behind a new logo.</a:t>
+            </a:r>
+          </a:p>
+          <a:p>
+            <a:r>
+              <a:t>"A new employer is not automatically a new direction for you." Let that land.</a:t>
+            </a:r>
+          </a:p>
+          <a:p>
+            <a:r>
+              <a:t>Nothing here should read as discouragement from leaving.</a:t>
             </a:r>
           </a:p>
         </p:txBody>
@@ -1302,47 +1173,32 @@
           <a:lstStyle/>
           <a:p>
             <a:r>
-              <a:t>Timing: 5:03-6:30</a:t>
-            </a:r>
-          </a:p>
-          <a:p/>
-          <a:p>
-            <a:r>
-              <a:t>Speak from ideas. Hold the contrast, then reveal the questions one at a time.</a:t>
-            </a:r>
-          </a:p>
-          <a:p/>
-          <a:p>
-            <a:r>
-              <a:t>Two cautions, spoken rather than on the slide.</a:t>
-            </a:r>
-          </a:p>
-          <a:p/>
-          <a:p>
-            <a:r>
-              <a:t>A move that uses nothing you have already developed may impose an unnecessary</a:t>
-            </a:r>
-          </a:p>
-          <a:p>
-            <a:r>
-              <a:t>reset.</a:t>
-            </a:r>
-          </a:p>
-          <a:p/>
-          <a:p>
-            <a:r>
-              <a:t>And a move that simply repeats the same work at another employer may change</a:t>
-            </a:r>
-          </a:p>
-          <a:p>
-            <a:r>
-              <a:t>the scenery without changing your position.</a:t>
-            </a:r>
-          </a:p>
-          <a:p/>
-          <a:p>
-            <a:r>
-              <a:t>The move worth making usually does both things at once.</a:t>
+              <a:t>Reveal frame 2 of 4 — main slide 8.</a:t>
+            </a:r>
+          </a:p>
+          <a:p>
+            <a:r>
+              <a:t>Timing: approximately 4:27.</a:t>
+            </a:r>
+          </a:p>
+          <a:p>
+            <a:r>
+              <a:t>Reveal the two halves, then the three questions.</a:t>
+            </a:r>
+          </a:p>
+          <a:p>
+            <a:r>
+              <a:t>The two kinds of reset both need room. A deliberate learning curve can be a very good decision; the risk is repeating the same work behind a new logo.</a:t>
+            </a:r>
+          </a:p>
+          <a:p>
+            <a:r>
+              <a:t>"A new employer is not automatically a new direction for you." Let that land.</a:t>
+            </a:r>
+          </a:p>
+          <a:p>
+            <a:r>
+              <a:t>Nothing here should read as discouragement from leaving.</a:t>
             </a:r>
           </a:p>
         </p:txBody>
@@ -1412,47 +1268,32 @@
           <a:lstStyle/>
           <a:p>
             <a:r>
-              <a:t>Timing: 5:03-6:30</a:t>
-            </a:r>
-          </a:p>
-          <a:p/>
-          <a:p>
-            <a:r>
-              <a:t>Speak from ideas. Hold the contrast, then reveal the questions one at a time.</a:t>
-            </a:r>
-          </a:p>
-          <a:p/>
-          <a:p>
-            <a:r>
-              <a:t>Two cautions, spoken rather than on the slide.</a:t>
-            </a:r>
-          </a:p>
-          <a:p/>
-          <a:p>
-            <a:r>
-              <a:t>A move that uses nothing you have already developed may impose an unnecessary</a:t>
-            </a:r>
-          </a:p>
-          <a:p>
-            <a:r>
-              <a:t>reset.</a:t>
-            </a:r>
-          </a:p>
-          <a:p/>
-          <a:p>
-            <a:r>
-              <a:t>And a move that simply repeats the same work at another employer may change</a:t>
-            </a:r>
-          </a:p>
-          <a:p>
-            <a:r>
-              <a:t>the scenery without changing your position.</a:t>
-            </a:r>
-          </a:p>
-          <a:p/>
-          <a:p>
-            <a:r>
-              <a:t>The move worth making usually does both things at once.</a:t>
+              <a:t>Reveal frame 3 of 4 — main slide 8.</a:t>
+            </a:r>
+          </a:p>
+          <a:p>
+            <a:r>
+              <a:t>Timing: approximately 4:27.</a:t>
+            </a:r>
+          </a:p>
+          <a:p>
+            <a:r>
+              <a:t>Reveal the two halves, then the three questions.</a:t>
+            </a:r>
+          </a:p>
+          <a:p>
+            <a:r>
+              <a:t>The two kinds of reset both need room. A deliberate learning curve can be a very good decision; the risk is repeating the same work behind a new logo.</a:t>
+            </a:r>
+          </a:p>
+          <a:p>
+            <a:r>
+              <a:t>"A new employer is not automatically a new direction for you." Let that land.</a:t>
+            </a:r>
+          </a:p>
+          <a:p>
+            <a:r>
+              <a:t>Nothing here should read as discouragement from leaving.</a:t>
             </a:r>
           </a:p>
         </p:txBody>
@@ -1522,47 +1363,32 @@
           <a:lstStyle/>
           <a:p>
             <a:r>
-              <a:t>Timing: 5:03-6:30</a:t>
-            </a:r>
-          </a:p>
-          <a:p/>
-          <a:p>
-            <a:r>
-              <a:t>Speak from ideas. Hold the contrast, then reveal the questions one at a time.</a:t>
-            </a:r>
-          </a:p>
-          <a:p/>
-          <a:p>
-            <a:r>
-              <a:t>Two cautions, spoken rather than on the slide.</a:t>
-            </a:r>
-          </a:p>
-          <a:p/>
-          <a:p>
-            <a:r>
-              <a:t>A move that uses nothing you have already developed may impose an unnecessary</a:t>
-            </a:r>
-          </a:p>
-          <a:p>
-            <a:r>
-              <a:t>reset.</a:t>
-            </a:r>
-          </a:p>
-          <a:p/>
-          <a:p>
-            <a:r>
-              <a:t>And a move that simply repeats the same work at another employer may change</a:t>
-            </a:r>
-          </a:p>
-          <a:p>
-            <a:r>
-              <a:t>the scenery without changing your position.</a:t>
-            </a:r>
-          </a:p>
-          <a:p/>
-          <a:p>
-            <a:r>
-              <a:t>The move worth making usually does both things at once.</a:t>
+              <a:t>Reveal frame 4 of 4 — main slide 8.</a:t>
+            </a:r>
+          </a:p>
+          <a:p>
+            <a:r>
+              <a:t>Timing: approximately 4:27.</a:t>
+            </a:r>
+          </a:p>
+          <a:p>
+            <a:r>
+              <a:t>Reveal the two halves, then the three questions.</a:t>
+            </a:r>
+          </a:p>
+          <a:p>
+            <a:r>
+              <a:t>The two kinds of reset both need room. A deliberate learning curve can be a very good decision; the risk is repeating the same work behind a new logo.</a:t>
+            </a:r>
+          </a:p>
+          <a:p>
+            <a:r>
+              <a:t>"A new employer is not automatically a new direction for you." Let that land.</a:t>
+            </a:r>
+          </a:p>
+          <a:p>
+            <a:r>
+              <a:t>Nothing here should read as discouragement from leaving.</a:t>
             </a:r>
           </a:p>
         </p:txBody>
@@ -1632,24 +1458,27 @@
           <a:lstStyle/>
           <a:p>
             <a:r>
-              <a:t>Timing: 6:30-6:45</a:t>
-            </a:r>
-          </a:p>
-          <a:p/>
-          <a:p>
-            <a:r>
-              <a:t>The first and only moment all three checks appear together.</a:t>
-            </a:r>
-          </a:p>
-          <a:p/>
-          <a:p>
-            <a:r>
-              <a:t>Name them once, in order: preserve the evidence, name what the work built,</a:t>
-            </a:r>
-          </a:p>
-          <a:p>
-            <a:r>
-              <a:t>test the next move. Do not teach them again.</a:t>
+              <a:t>Single-state frame — main slide 9.</a:t>
+            </a:r>
+          </a:p>
+          <a:p>
+            <a:r>
+              <a:t>Timing: approximately 5:32.</a:t>
+            </a:r>
+          </a:p>
+          <a:p>
+            <a:r>
+              <a:t>The consolidation card. Reveal the three in order.</a:t>
+            </a:r>
+          </a:p>
+          <a:p>
+            <a:r>
+              <a:t>"In that order. Not because leaving is wrong." That qualifier is load-bearing — this video is not three reasons to stay. Do not cut it.</a:t>
+            </a:r>
+          </a:p>
+          <a:p>
+            <a:r>
+              <a:t>Do not add a fourth item, an acronym or a slogan. The three checks are the only memory device in this video.</a:t>
             </a:r>
           </a:p>
         </p:txBody>
@@ -1719,51 +1548,42 @@
           <a:lstStyle/>
           <a:p>
             <a:r>
-              <a:t>Timing: 0:50-1:35</a:t>
-            </a:r>
-          </a:p>
-          <a:p/>
-          <a:p>
-            <a:r>
-              <a:t>Speak from ideas, calmly. The point is timing, not fear. Most of what makes a</a:t>
-            </a:r>
-          </a:p>
-          <a:p>
-            <a:r>
-              <a:t>career decision legible is easiest to gather while you still have access.</a:t>
-            </a:r>
-          </a:p>
-          <a:p/>
-          <a:p>
-            <a:r>
-              <a:t>State the safety boundary out loud, clearly, and do not soften it:</a:t>
-            </a:r>
-          </a:p>
-          <a:p/>
-          <a:p>
-            <a:r>
-              <a:t>"If your health or safety is at risk, or you are facing harassment,</a:t>
-            </a:r>
-          </a:p>
-          <a:p>
-            <a:r>
-              <a:t>discrimination or another urgent threat, nothing in this video is a reason to</a:t>
-            </a:r>
-          </a:p>
-          <a:p>
-            <a:r>
-              <a:t>delay leaving. Please act on that first."</a:t>
-            </a:r>
-          </a:p>
-          <a:p/>
-          <a:p>
-            <a:r>
-              <a:t>Then return to the viewer who has time to think, and say that the rest of the</a:t>
-            </a:r>
-          </a:p>
-          <a:p>
-            <a:r>
-              <a:t>video is for them.</a:t>
+              <a:t>Single-state frame — main slide 2.</a:t>
+            </a:r>
+          </a:p>
+          <a:p>
+            <a:r>
+              <a:t>Timing: approximately 0:55.</a:t>
+            </a:r>
+          </a:p>
+          <a:p>
+            <a:r>
+              <a:t>Speak from ideas, calmly. The point is timing, not fear.</a:t>
+            </a:r>
+          </a:p>
+          <a:p>
+            <a:r>
+              <a:t>STATE THE SAFETY BOUNDARY OUT LOUD, IN FULL, AND DO NOT SOFTEN IT:</a:t>
+            </a:r>
+          </a:p>
+          <a:p>
+            <a:r>
+              <a:t>"If your health or safety is at risk, or you are dealing with harassment, discrimination or another urgent threat, nothing in this video is a reason to delay leaving. Act on that first."</a:t>
+            </a:r>
+          </a:p>
+          <a:p>
+            <a:r>
+              <a:t>Deliver it humanely and directly. It is not a legal disclaimer and must not be edited to look like one — no fine print, no red alarm graphic, no cutaway.</a:t>
+            </a:r>
+          </a:p>
+          <a:p>
+            <a:r>
+              <a:t>Then return to the viewer who has time to think, and say plainly that the rest of the video is for them.</a:t>
+            </a:r>
+          </a:p>
+          <a:p>
+            <a:r>
+              <a:t>The closing beat of this section is addressed straight at the viewer: "I am not trying to make you hesitate. I am trying to make sure you do not leave the meaning of your own experience behind." </a:t>
             </a:r>
           </a:p>
         </p:txBody>
@@ -1833,40 +1653,32 @@
           <a:lstStyle/>
           <a:p>
             <a:r>
-              <a:t>Timing: 6:45-7:45</a:t>
-            </a:r>
-          </a:p>
-          <a:p/>
-          <a:p>
-            <a:r>
-              <a:t>Reveal one direction at a time. Keep this provisional. You are not diagnosing</a:t>
-            </a:r>
-          </a:p>
-          <a:p>
-            <a:r>
-              <a:t>the viewer and you are not telling them which one is correct.</a:t>
-            </a:r>
-          </a:p>
-          <a:p/>
-          <a:p>
-            <a:r>
-              <a:t>Say the line as written: the point is not to make the decision slow, the point</a:t>
-            </a:r>
-          </a:p>
-          <a:p>
-            <a:r>
-              <a:t>is to make it legible.</a:t>
-            </a:r>
-          </a:p>
-          <a:p/>
-          <a:p>
-            <a:r>
-              <a:t>If the earlier safety boundary applies to someone watching, repeat it briefly</a:t>
-            </a:r>
-          </a:p>
-          <a:p>
-            <a:r>
-              <a:t>here. A harmful situation does not need a bridge plan.</a:t>
+              <a:t>Reveal frame 1 of 3 — main slide 10.</a:t>
+            </a:r>
+          </a:p>
+          <a:p>
+            <a:r>
+              <a:t>Timing: approximately 5:51.</a:t>
+            </a:r>
+          </a:p>
+          <a:p>
+            <a:r>
+              <a:t>Reveal one direction at a time. Keep it provisional. Temidayo is not diagnosing the viewer and not telling them which direction is correct.</a:t>
+            </a:r>
+          </a:p>
+          <a:p>
+            <a:r>
+              <a:t>Real constraints stay in: pay, benefits, caregiving and timing legitimately affect when someone moves.</a:t>
+            </a:r>
+          </a:p>
+          <a:p>
+            <a:r>
+              <a:t>Say the line as written, in its v3.0 form: "I am not trying to make your decision slow. I am trying to make it legible to you."</a:t>
+            </a:r>
+          </a:p>
+          <a:p>
+            <a:r>
+              <a:t>The safety boundary is repeated here, briefly and plainly: a harmful situation does not need a bridge plan. Do not cut it.</a:t>
             </a:r>
           </a:p>
         </p:txBody>
@@ -1936,40 +1748,32 @@
           <a:lstStyle/>
           <a:p>
             <a:r>
-              <a:t>Timing: 6:45-7:45</a:t>
-            </a:r>
-          </a:p>
-          <a:p/>
-          <a:p>
-            <a:r>
-              <a:t>Reveal one direction at a time. Keep this provisional. You are not diagnosing</a:t>
-            </a:r>
-          </a:p>
-          <a:p>
-            <a:r>
-              <a:t>the viewer and you are not telling them which one is correct.</a:t>
-            </a:r>
-          </a:p>
-          <a:p/>
-          <a:p>
-            <a:r>
-              <a:t>Say the line as written: the point is not to make the decision slow, the point</a:t>
-            </a:r>
-          </a:p>
-          <a:p>
-            <a:r>
-              <a:t>is to make it legible.</a:t>
-            </a:r>
-          </a:p>
-          <a:p/>
-          <a:p>
-            <a:r>
-              <a:t>If the earlier safety boundary applies to someone watching, repeat it briefly</a:t>
-            </a:r>
-          </a:p>
-          <a:p>
-            <a:r>
-              <a:t>here. A harmful situation does not need a bridge plan.</a:t>
+              <a:t>Reveal frame 2 of 3 — main slide 10.</a:t>
+            </a:r>
+          </a:p>
+          <a:p>
+            <a:r>
+              <a:t>Timing: approximately 5:51.</a:t>
+            </a:r>
+          </a:p>
+          <a:p>
+            <a:r>
+              <a:t>Reveal one direction at a time. Keep it provisional. Temidayo is not diagnosing the viewer and not telling them which direction is correct.</a:t>
+            </a:r>
+          </a:p>
+          <a:p>
+            <a:r>
+              <a:t>Real constraints stay in: pay, benefits, caregiving and timing legitimately affect when someone moves.</a:t>
+            </a:r>
+          </a:p>
+          <a:p>
+            <a:r>
+              <a:t>Say the line as written, in its v3.0 form: "I am not trying to make your decision slow. I am trying to make it legible to you."</a:t>
+            </a:r>
+          </a:p>
+          <a:p>
+            <a:r>
+              <a:t>The safety boundary is repeated here, briefly and plainly: a harmful situation does not need a bridge plan. Do not cut it.</a:t>
             </a:r>
           </a:p>
         </p:txBody>
@@ -2039,40 +1843,32 @@
           <a:lstStyle/>
           <a:p>
             <a:r>
-              <a:t>Timing: 6:45-7:45</a:t>
-            </a:r>
-          </a:p>
-          <a:p/>
-          <a:p>
-            <a:r>
-              <a:t>Reveal one direction at a time. Keep this provisional. You are not diagnosing</a:t>
-            </a:r>
-          </a:p>
-          <a:p>
-            <a:r>
-              <a:t>the viewer and you are not telling them which one is correct.</a:t>
-            </a:r>
-          </a:p>
-          <a:p/>
-          <a:p>
-            <a:r>
-              <a:t>Say the line as written: the point is not to make the decision slow, the point</a:t>
-            </a:r>
-          </a:p>
-          <a:p>
-            <a:r>
-              <a:t>is to make it legible.</a:t>
-            </a:r>
-          </a:p>
-          <a:p/>
-          <a:p>
-            <a:r>
-              <a:t>If the earlier safety boundary applies to someone watching, repeat it briefly</a:t>
-            </a:r>
-          </a:p>
-          <a:p>
-            <a:r>
-              <a:t>here. A harmful situation does not need a bridge plan.</a:t>
+              <a:t>Reveal frame 3 of 3 — main slide 10.</a:t>
+            </a:r>
+          </a:p>
+          <a:p>
+            <a:r>
+              <a:t>Timing: approximately 5:51.</a:t>
+            </a:r>
+          </a:p>
+          <a:p>
+            <a:r>
+              <a:t>Reveal one direction at a time. Keep it provisional. Temidayo is not diagnosing the viewer and not telling them which direction is correct.</a:t>
+            </a:r>
+          </a:p>
+          <a:p>
+            <a:r>
+              <a:t>Real constraints stay in: pay, benefits, caregiving and timing legitimately affect when someone moves.</a:t>
+            </a:r>
+          </a:p>
+          <a:p>
+            <a:r>
+              <a:t>Say the line as written, in its v3.0 form: "I am not trying to make your decision slow. I am trying to make it legible to you."</a:t>
+            </a:r>
+          </a:p>
+          <a:p>
+            <a:r>
+              <a:t>The safety boundary is repeated here, briefly and plainly: a harmful situation does not need a bridge plan. Do not cut it.</a:t>
             </a:r>
           </a:p>
         </p:txBody>
@@ -2142,24 +1938,27 @@
           <a:lstStyle/>
           <a:p>
             <a:r>
-              <a:t>Timing: 7:45-8:35</a:t>
-            </a:r>
-          </a:p>
-          <a:p/>
-          <a:p>
-            <a:r>
-              <a:t>Ask one question at a time and pause after each one. Leave five to seven</a:t>
-            </a:r>
-          </a:p>
-          <a:p>
-            <a:r>
-              <a:t>seconds of quiet after the third.</a:t>
-            </a:r>
-          </a:p>
-          <a:p/>
-          <a:p>
-            <a:r>
-              <a:t>Tell the viewer they can pause the video here and write the answers down.</a:t>
+              <a:t>Reveal frame 1 of 3 — main slide 11.</a:t>
+            </a:r>
+          </a:p>
+          <a:p>
+            <a:r>
+              <a:t>Timing: approximately 7:07.</a:t>
+            </a:r>
+          </a:p>
+          <a:p>
+            <a:r>
+              <a:t>Reveal the three questions one at a time.</a:t>
+            </a:r>
+          </a:p>
+          <a:p>
+            <a:r>
+              <a:t>The instruction is concrete and directed at the viewer: do not keep the answers only in your head, write them down.</a:t>
+            </a:r>
+          </a:p>
+          <a:p>
+            <a:r>
+              <a:t>Close on the three sentences she wants them to be able to say — what I handled, what I became able to do, what I need next. Stay on Temidayo for those.</a:t>
             </a:r>
           </a:p>
         </p:txBody>
@@ -2229,24 +2028,27 @@
           <a:lstStyle/>
           <a:p>
             <a:r>
-              <a:t>Timing: 7:45-8:35</a:t>
-            </a:r>
-          </a:p>
-          <a:p/>
-          <a:p>
-            <a:r>
-              <a:t>Ask one question at a time and pause after each one. Leave five to seven</a:t>
-            </a:r>
-          </a:p>
-          <a:p>
-            <a:r>
-              <a:t>seconds of quiet after the third.</a:t>
-            </a:r>
-          </a:p>
-          <a:p/>
-          <a:p>
-            <a:r>
-              <a:t>Tell the viewer they can pause the video here and write the answers down.</a:t>
+              <a:t>Reveal frame 2 of 3 — main slide 11.</a:t>
+            </a:r>
+          </a:p>
+          <a:p>
+            <a:r>
+              <a:t>Timing: approximately 7:07.</a:t>
+            </a:r>
+          </a:p>
+          <a:p>
+            <a:r>
+              <a:t>Reveal the three questions one at a time.</a:t>
+            </a:r>
+          </a:p>
+          <a:p>
+            <a:r>
+              <a:t>The instruction is concrete and directed at the viewer: do not keep the answers only in your head, write them down.</a:t>
+            </a:r>
+          </a:p>
+          <a:p>
+            <a:r>
+              <a:t>Close on the three sentences she wants them to be able to say — what I handled, what I became able to do, what I need next. Stay on Temidayo for those.</a:t>
             </a:r>
           </a:p>
         </p:txBody>
@@ -2316,24 +2118,27 @@
           <a:lstStyle/>
           <a:p>
             <a:r>
-              <a:t>Timing: 7:45-8:35</a:t>
-            </a:r>
-          </a:p>
-          <a:p/>
-          <a:p>
-            <a:r>
-              <a:t>Ask one question at a time and pause after each one. Leave five to seven</a:t>
-            </a:r>
-          </a:p>
-          <a:p>
-            <a:r>
-              <a:t>seconds of quiet after the third.</a:t>
-            </a:r>
-          </a:p>
-          <a:p/>
-          <a:p>
-            <a:r>
-              <a:t>Tell the viewer they can pause the video here and write the answers down.</a:t>
+              <a:t>Reveal frame 3 of 3 — main slide 11.</a:t>
+            </a:r>
+          </a:p>
+          <a:p>
+            <a:r>
+              <a:t>Timing: approximately 7:07.</a:t>
+            </a:r>
+          </a:p>
+          <a:p>
+            <a:r>
+              <a:t>Reveal the three questions one at a time.</a:t>
+            </a:r>
+          </a:p>
+          <a:p>
+            <a:r>
+              <a:t>The instruction is concrete and directed at the viewer: do not keep the answers only in your head, write them down.</a:t>
+            </a:r>
+          </a:p>
+          <a:p>
+            <a:r>
+              <a:t>Close on the three sentences she wants them to be able to say — what I handled, what I became able to do, what I need next. Stay on Temidayo for those.</a:t>
             </a:r>
           </a:p>
         </p:txBody>
@@ -2403,40 +2208,27 @@
           <a:lstStyle/>
           <a:p>
             <a:r>
-              <a:t>Timing: 8:35-9:00</a:t>
-            </a:r>
-          </a:p>
-          <a:p/>
-          <a:p>
-            <a:r>
-              <a:t>Calm and brief. This is the only invitation in the video, and it is the Career</a:t>
-            </a:r>
-          </a:p>
-          <a:p>
-            <a:r>
-              <a:t>Decision Evidence Check, not the Field Kit.</a:t>
-            </a:r>
-          </a:p>
-          <a:p/>
-          <a:p>
-            <a:r>
-              <a:t>Say it plainly: if you want a structured read of the evidence behind the</a:t>
-            </a:r>
-          </a:p>
-          <a:p>
-            <a:r>
-              <a:t>decision you are weighing, that is what this is for, and it is at</a:t>
-            </a:r>
-          </a:p>
-          <a:p>
-            <a:r>
-              <a:t>temidayoafonja.com/career-decisions.</a:t>
-            </a:r>
-          </a:p>
-          <a:p/>
-          <a:p>
-            <a:r>
-              <a:t>Before publishing, confirm that route is live and reaches the right place.</a:t>
+              <a:t>Single-state frame — main slide 12.</a:t>
+            </a:r>
+          </a:p>
+          <a:p>
+            <a:r>
+              <a:t>Timing: approximately 7:50.</a:t>
+            </a:r>
+          </a:p>
+          <a:p>
+            <a:r>
+              <a:t>Calm and brief. This is the only invitation in the video, and it is the Career Decision Evidence Check — not the Field Kit, not Keep the Proof, not the Career Evidence Starter.</a:t>
+            </a:r>
+          </a:p>
+          <a:p>
+            <a:r>
+              <a:t>Note the v3.0 phrasing: "that is what I made the Career Decision Evidence Check for." It is offered, not announced. Keep it that way.</a:t>
+            </a:r>
+          </a:p>
+          <a:p>
+            <a:r>
+              <a:t>CTA PRODUCTION GATE: SATISFIED. The page is live. One signed-out production check is still required before Video 3 is uploaded or scheduled: confirm it loads for a visitor who is not signed in and is not holding a preview link.</a:t>
             </a:r>
           </a:p>
         </p:txBody>
@@ -2506,35 +2298,32 @@
           <a:lstStyle/>
           <a:p>
             <a:r>
-              <a:t>Timing: 9:00-9:25</a:t>
-            </a:r>
-          </a:p>
-          <a:p/>
-          <a:p>
-            <a:r>
-              <a:t>If the move changes function or industry, this is the video that answers what</a:t>
-            </a:r>
-          </a:p>
-          <a:p>
-            <a:r>
-              <a:t>carries across.</a:t>
-            </a:r>
-          </a:p>
-          <a:p/>
+              <a:t>Single-state frame — main slide 13.</a:t>
+            </a:r>
+          </a:p>
+          <a:p>
+            <a:r>
+              <a:t>Timing: approximately 8:14 to the end, about 8:37.</a:t>
+            </a:r>
+          </a:p>
+          <a:p>
+            <a:r>
+              <a:t>If the move changes role, function, employer or industry, this is the video that answers what carries across. The card reads "How to Change Jobs Without Starting Your Career Over", which is the locked Video 1 title and matches what Temidayo says.</a:t>
+            </a:r>
+          </a:p>
+          <a:p>
+            <a:r>
+              <a:t>Closing line: "Because leaving one job should not require you to erase everything your work has already built in you."</a:t>
+            </a:r>
+          </a:p>
           <a:p>
             <a:r>
               <a:t>Do not summarize this video again.</a:t>
             </a:r>
           </a:p>
-          <a:p/>
-          <a:p>
-            <a:r>
-              <a:t>The right side of the frame is left open for the YouTube linked-video</a:t>
-            </a:r>
-          </a:p>
-          <a:p>
-            <a:r>
-              <a:t>end-screen element. Hold the final frame for at least 12 seconds.</a:t>
+          <a:p>
+            <a:r>
+              <a:t>The right side of the frame is left open for the YouTube linked-video end-screen element. Hold the final frame for at least 12 seconds.</a:t>
             </a:r>
           </a:p>
         </p:txBody>
@@ -2604,35 +2393,17 @@
           <a:lstStyle/>
           <a:p>
             <a:r>
-              <a:t>Timing: 1:35-1:43</a:t>
-            </a:r>
-          </a:p>
-          <a:p/>
-          <a:p>
-            <a:r>
-              <a:t>A section break, four to seven seconds. Say: "The first check is to preserve</a:t>
-            </a:r>
-          </a:p>
-          <a:p>
-            <a:r>
-              <a:t>the evidence."</a:t>
-            </a:r>
-          </a:p>
-          <a:p/>
-          <a:p>
-            <a:r>
-              <a:t>Do not teach it here. The next slide carries it.</a:t>
-            </a:r>
-          </a:p>
-          <a:p/>
-          <a:p>
-            <a:r>
-              <a:t>Only this check is on screen. The second and third come later, each in its own</a:t>
-            </a:r>
-          </a:p>
-          <a:p>
-            <a:r>
-              <a:t>moment.</a:t>
+              <a:t>Single-state frame — main slide 3.</a:t>
+            </a:r>
+          </a:p>
+          <a:p>
+            <a:r>
+              <a:t>Timing: approximately 2:01, holding to about 2:04.</a:t>
+            </a:r>
+          </a:p>
+          <a:p>
+            <a:r>
+              <a:t>Section card. Hold briefly, then return to presenter.</a:t>
             </a:r>
           </a:p>
         </p:txBody>
@@ -2702,68 +2473,37 @@
           <a:lstStyle/>
           <a:p>
             <a:r>
-              <a:t>Timing: 1:43-3:15</a:t>
-            </a:r>
-          </a:p>
-          <a:p/>
-          <a:p>
-            <a:r>
-              <a:t>Speak from ideas. Reveal the left column two items at a time, then bring up</a:t>
-            </a:r>
-          </a:p>
-          <a:p>
-            <a:r>
-              <a:t>the boundary column.</a:t>
-            </a:r>
-          </a:p>
-          <a:p/>
-          <a:p>
-            <a:r>
-              <a:t>Say the boundary plainly. Do not take confidential information, customer data,</a:t>
-            </a:r>
-          </a:p>
-          <a:p>
-            <a:r>
-              <a:t>employee data, proprietary documents, or anything the employer owns that you</a:t>
-            </a:r>
-          </a:p>
-          <a:p>
-            <a:r>
-              <a:t>have no right to keep. Preserving your record does not mean taking their</a:t>
-            </a:r>
-          </a:p>
-          <a:p>
-            <a:r>
-              <a:t>material.</a:t>
-            </a:r>
-          </a:p>
-          <a:p/>
-          <a:p>
-            <a:r>
-              <a:t>The test to say out loud: if you are not entitled to keep it, do not take it.</a:t>
-            </a:r>
-          </a:p>
-          <a:p/>
-          <a:p>
-            <a:r>
-              <a:t>Then give the shape of the record itself, spoken, not on the slide:</a:t>
-            </a:r>
-          </a:p>
-          <a:p/>
-          <a:p>
-            <a:r>
-              <a:t>What changed? What was the starting condition? What did I decide or influence?</a:t>
-            </a:r>
-          </a:p>
-          <a:p>
-            <a:r>
-              <a:t>Who was affected? What permitted evidence supports the result?</a:t>
-            </a:r>
-          </a:p>
-          <a:p/>
-          <a:p>
-            <a:r>
-              <a:t>Nothing here needs a screenshot of an employer system.</a:t>
+              <a:t>Reveal frame 1 of 4 — main slide 4.</a:t>
+            </a:r>
+          </a:p>
+          <a:p>
+            <a:r>
+              <a:t>Timing: approximately 2:04.</a:t>
+            </a:r>
+          </a:p>
+          <a:p>
+            <a:r>
+              <a:t>Reveal the left column two items at a time, then bring up the boundary column.</a:t>
+            </a:r>
+          </a:p>
+          <a:p>
+            <a:r>
+              <a:t>Say the boundary plainly. Confidential information, customer data, employee data, proprietary documents and anything the employer owns stay with the employer. Preserving your record does not mean taking their material.</a:t>
+            </a:r>
+          </a:p>
+          <a:p>
+            <a:r>
+              <a:t>The test to say out loud: if you do not have the right to keep it, do not take it.</a:t>
+            </a:r>
+          </a:p>
+          <a:p>
+            <a:r>
+              <a:t>Then give the shape of the record itself, spoken, not on the slide: the starting condition, what you decided or influenced, what changed, and what permitted evidence supports that result.</a:t>
+            </a:r>
+          </a:p>
+          <a:p>
+            <a:r>
+              <a:t>Nothing here needs a screenshot of an employer system. Close on the reassurance that a filing cabinet is not the goal — enough context to explain the work six months later is.</a:t>
             </a:r>
           </a:p>
         </p:txBody>
@@ -2833,68 +2573,37 @@
           <a:lstStyle/>
           <a:p>
             <a:r>
-              <a:t>Timing: 1:43-3:15</a:t>
-            </a:r>
-          </a:p>
-          <a:p/>
-          <a:p>
-            <a:r>
-              <a:t>Speak from ideas. Reveal the left column two items at a time, then bring up</a:t>
-            </a:r>
-          </a:p>
-          <a:p>
-            <a:r>
-              <a:t>the boundary column.</a:t>
-            </a:r>
-          </a:p>
-          <a:p/>
-          <a:p>
-            <a:r>
-              <a:t>Say the boundary plainly. Do not take confidential information, customer data,</a:t>
-            </a:r>
-          </a:p>
-          <a:p>
-            <a:r>
-              <a:t>employee data, proprietary documents, or anything the employer owns that you</a:t>
-            </a:r>
-          </a:p>
-          <a:p>
-            <a:r>
-              <a:t>have no right to keep. Preserving your record does not mean taking their</a:t>
-            </a:r>
-          </a:p>
-          <a:p>
-            <a:r>
-              <a:t>material.</a:t>
-            </a:r>
-          </a:p>
-          <a:p/>
-          <a:p>
-            <a:r>
-              <a:t>The test to say out loud: if you are not entitled to keep it, do not take it.</a:t>
-            </a:r>
-          </a:p>
-          <a:p/>
-          <a:p>
-            <a:r>
-              <a:t>Then give the shape of the record itself, spoken, not on the slide:</a:t>
-            </a:r>
-          </a:p>
-          <a:p/>
-          <a:p>
-            <a:r>
-              <a:t>What changed? What was the starting condition? What did I decide or influence?</a:t>
-            </a:r>
-          </a:p>
-          <a:p>
-            <a:r>
-              <a:t>Who was affected? What permitted evidence supports the result?</a:t>
-            </a:r>
-          </a:p>
-          <a:p/>
-          <a:p>
-            <a:r>
-              <a:t>Nothing here needs a screenshot of an employer system.</a:t>
+              <a:t>Reveal frame 2 of 4 — main slide 4.</a:t>
+            </a:r>
+          </a:p>
+          <a:p>
+            <a:r>
+              <a:t>Timing: approximately 2:04.</a:t>
+            </a:r>
+          </a:p>
+          <a:p>
+            <a:r>
+              <a:t>Reveal the left column two items at a time, then bring up the boundary column.</a:t>
+            </a:r>
+          </a:p>
+          <a:p>
+            <a:r>
+              <a:t>Say the boundary plainly. Confidential information, customer data, employee data, proprietary documents and anything the employer owns stay with the employer. Preserving your record does not mean taking their material.</a:t>
+            </a:r>
+          </a:p>
+          <a:p>
+            <a:r>
+              <a:t>The test to say out loud: if you do not have the right to keep it, do not take it.</a:t>
+            </a:r>
+          </a:p>
+          <a:p>
+            <a:r>
+              <a:t>Then give the shape of the record itself, spoken, not on the slide: the starting condition, what you decided or influenced, what changed, and what permitted evidence supports that result.</a:t>
+            </a:r>
+          </a:p>
+          <a:p>
+            <a:r>
+              <a:t>Nothing here needs a screenshot of an employer system. Close on the reassurance that a filing cabinet is not the goal — enough context to explain the work six months later is.</a:t>
             </a:r>
           </a:p>
         </p:txBody>
@@ -2964,68 +2673,37 @@
           <a:lstStyle/>
           <a:p>
             <a:r>
-              <a:t>Timing: 1:43-3:15</a:t>
-            </a:r>
-          </a:p>
-          <a:p/>
-          <a:p>
-            <a:r>
-              <a:t>Speak from ideas. Reveal the left column two items at a time, then bring up</a:t>
-            </a:r>
-          </a:p>
-          <a:p>
-            <a:r>
-              <a:t>the boundary column.</a:t>
-            </a:r>
-          </a:p>
-          <a:p/>
-          <a:p>
-            <a:r>
-              <a:t>Say the boundary plainly. Do not take confidential information, customer data,</a:t>
-            </a:r>
-          </a:p>
-          <a:p>
-            <a:r>
-              <a:t>employee data, proprietary documents, or anything the employer owns that you</a:t>
-            </a:r>
-          </a:p>
-          <a:p>
-            <a:r>
-              <a:t>have no right to keep. Preserving your record does not mean taking their</a:t>
-            </a:r>
-          </a:p>
-          <a:p>
-            <a:r>
-              <a:t>material.</a:t>
-            </a:r>
-          </a:p>
-          <a:p/>
-          <a:p>
-            <a:r>
-              <a:t>The test to say out loud: if you are not entitled to keep it, do not take it.</a:t>
-            </a:r>
-          </a:p>
-          <a:p/>
-          <a:p>
-            <a:r>
-              <a:t>Then give the shape of the record itself, spoken, not on the slide:</a:t>
-            </a:r>
-          </a:p>
-          <a:p/>
-          <a:p>
-            <a:r>
-              <a:t>What changed? What was the starting condition? What did I decide or influence?</a:t>
-            </a:r>
-          </a:p>
-          <a:p>
-            <a:r>
-              <a:t>Who was affected? What permitted evidence supports the result?</a:t>
-            </a:r>
-          </a:p>
-          <a:p/>
-          <a:p>
-            <a:r>
-              <a:t>Nothing here needs a screenshot of an employer system.</a:t>
+              <a:t>Reveal frame 3 of 4 — main slide 4.</a:t>
+            </a:r>
+          </a:p>
+          <a:p>
+            <a:r>
+              <a:t>Timing: approximately 2:04.</a:t>
+            </a:r>
+          </a:p>
+          <a:p>
+            <a:r>
+              <a:t>Reveal the left column two items at a time, then bring up the boundary column.</a:t>
+            </a:r>
+          </a:p>
+          <a:p>
+            <a:r>
+              <a:t>Say the boundary plainly. Confidential information, customer data, employee data, proprietary documents and anything the employer owns stay with the employer. Preserving your record does not mean taking their material.</a:t>
+            </a:r>
+          </a:p>
+          <a:p>
+            <a:r>
+              <a:t>The test to say out loud: if you do not have the right to keep it, do not take it.</a:t>
+            </a:r>
+          </a:p>
+          <a:p>
+            <a:r>
+              <a:t>Then give the shape of the record itself, spoken, not on the slide: the starting condition, what you decided or influenced, what changed, and what permitted evidence supports that result.</a:t>
+            </a:r>
+          </a:p>
+          <a:p>
+            <a:r>
+              <a:t>Nothing here needs a screenshot of an employer system. Close on the reassurance that a filing cabinet is not the goal — enough context to explain the work six months later is.</a:t>
             </a:r>
           </a:p>
         </p:txBody>
@@ -3095,68 +2773,37 @@
           <a:lstStyle/>
           <a:p>
             <a:r>
-              <a:t>Timing: 1:43-3:15</a:t>
-            </a:r>
-          </a:p>
-          <a:p/>
-          <a:p>
-            <a:r>
-              <a:t>Speak from ideas. Reveal the left column two items at a time, then bring up</a:t>
-            </a:r>
-          </a:p>
-          <a:p>
-            <a:r>
-              <a:t>the boundary column.</a:t>
-            </a:r>
-          </a:p>
-          <a:p/>
-          <a:p>
-            <a:r>
-              <a:t>Say the boundary plainly. Do not take confidential information, customer data,</a:t>
-            </a:r>
-          </a:p>
-          <a:p>
-            <a:r>
-              <a:t>employee data, proprietary documents, or anything the employer owns that you</a:t>
-            </a:r>
-          </a:p>
-          <a:p>
-            <a:r>
-              <a:t>have no right to keep. Preserving your record does not mean taking their</a:t>
-            </a:r>
-          </a:p>
-          <a:p>
-            <a:r>
-              <a:t>material.</a:t>
-            </a:r>
-          </a:p>
-          <a:p/>
-          <a:p>
-            <a:r>
-              <a:t>The test to say out loud: if you are not entitled to keep it, do not take it.</a:t>
-            </a:r>
-          </a:p>
-          <a:p/>
-          <a:p>
-            <a:r>
-              <a:t>Then give the shape of the record itself, spoken, not on the slide:</a:t>
-            </a:r>
-          </a:p>
-          <a:p/>
-          <a:p>
-            <a:r>
-              <a:t>What changed? What was the starting condition? What did I decide or influence?</a:t>
-            </a:r>
-          </a:p>
-          <a:p>
-            <a:r>
-              <a:t>Who was affected? What permitted evidence supports the result?</a:t>
-            </a:r>
-          </a:p>
-          <a:p/>
-          <a:p>
-            <a:r>
-              <a:t>Nothing here needs a screenshot of an employer system.</a:t>
+              <a:t>Reveal frame 4 of 4 — main slide 4.</a:t>
+            </a:r>
+          </a:p>
+          <a:p>
+            <a:r>
+              <a:t>Timing: approximately 2:04.</a:t>
+            </a:r>
+          </a:p>
+          <a:p>
+            <a:r>
+              <a:t>Reveal the left column two items at a time, then bring up the boundary column.</a:t>
+            </a:r>
+          </a:p>
+          <a:p>
+            <a:r>
+              <a:t>Say the boundary plainly. Confidential information, customer data, employee data, proprietary documents and anything the employer owns stay with the employer. Preserving your record does not mean taking their material.</a:t>
+            </a:r>
+          </a:p>
+          <a:p>
+            <a:r>
+              <a:t>The test to say out loud: if you do not have the right to keep it, do not take it.</a:t>
+            </a:r>
+          </a:p>
+          <a:p>
+            <a:r>
+              <a:t>Then give the shape of the record itself, spoken, not on the slide: the starting condition, what you decided or influenced, what changed, and what permitted evidence supports that result.</a:t>
+            </a:r>
+          </a:p>
+          <a:p>
+            <a:r>
+              <a:t>Nothing here needs a screenshot of an employer system. Close on the reassurance that a filing cabinet is not the goal — enough context to explain the work six months later is.</a:t>
             </a:r>
           </a:p>
         </p:txBody>
@@ -3226,24 +2873,17 @@
           <a:lstStyle/>
           <a:p>
             <a:r>
-              <a:t>Timing: 3:15-3:23</a:t>
-            </a:r>
-          </a:p>
-          <a:p/>
-          <a:p>
-            <a:r>
-              <a:t>A section break, four to seven seconds. Say: "The second check is to name what</a:t>
-            </a:r>
-          </a:p>
-          <a:p>
-            <a:r>
-              <a:t>the work built."</a:t>
-            </a:r>
-          </a:p>
-          <a:p/>
-          <a:p>
-            <a:r>
-              <a:t>Do not restate the first check.</a:t>
+              <a:t>Single-state frame — main slide 5.</a:t>
+            </a:r>
+          </a:p>
+          <a:p>
+            <a:r>
+              <a:t>Timing: approximately 3:07, holding to about 3:12.</a:t>
+            </a:r>
+          </a:p>
+          <a:p>
+            <a:r>
+              <a:t>Section card. Hold briefly, then return to presenter.</a:t>
             </a:r>
           </a:p>
         </p:txBody>
@@ -3313,50 +2953,32 @@
           <a:lstStyle/>
           <a:p>
             <a:r>
-              <a:t>Timing: 3:23-4:55</a:t>
-            </a:r>
-          </a:p>
-          <a:p/>
-          <a:p>
-            <a:r>
-              <a:t>Speak from ideas. Reveal one row at a time, then the closing question.</a:t>
-            </a:r>
-          </a:p>
-          <a:p/>
-          <a:p>
-            <a:r>
-              <a:t>Use the generic example. Someone may have reduced the time an internal process</a:t>
-            </a:r>
-          </a:p>
-          <a:p>
-            <a:r>
-              <a:t>took. The portable value is usually not the number. It is the ability to</a:t>
-            </a:r>
-          </a:p>
-          <a:p>
-            <a:r>
-              <a:t>identify where work was getting stuck, align people who owned different parts</a:t>
-            </a:r>
-          </a:p>
-          <a:p>
-            <a:r>
-              <a:t>of the system, redesign the handoff, and do it without creating a new control</a:t>
-            </a:r>
-          </a:p>
-          <a:p>
-            <a:r>
-              <a:t>failure.</a:t>
-            </a:r>
-          </a:p>
-          <a:p/>
-          <a:p>
-            <a:r>
-              <a:t>That combination is what another organization can use. Do not invent</a:t>
-            </a:r>
-          </a:p>
-          <a:p>
-            <a:r>
-              <a:t>statistics; the shape of the judgment is the evidence.</a:t>
+              <a:t>Reveal frame 1 of 5 — main slide 6.</a:t>
+            </a:r>
+          </a:p>
+          <a:p>
+            <a:r>
+              <a:t>Timing: approximately 3:12.</a:t>
+            </a:r>
+          </a:p>
+          <a:p>
+            <a:r>
+              <a:t>Reveal the four prompts one at a time as each is named.</a:t>
+            </a:r>
+          </a:p>
+          <a:p>
+            <a:r>
+              <a:t>Note the direct-address framing in v3.0: Temidayo says "Say you tell me: 'I reduced the amount of time an internal process took.' That gives me an outcome." She is standing in as the listener across the table, and the example is then turned back on the viewer — "what you may have actually learned to do was…". Keep her on camera through that exchange so it reads as a conversation, not a case study.</a:t>
+            </a:r>
+          </a:p>
+          <a:p>
+            <a:r>
+              <a:t>The example stays generic. No employer, client, system, metric or result.</a:t>
+            </a:r>
+          </a:p>
+          <a:p>
+            <a:r>
+              <a:t>Close on the two questions she hands the viewer: what did your work prove you can now do, and where else could that be useful?</a:t>
             </a:r>
           </a:p>
         </p:txBody>

--- a/deliverables/video-3-slides/out/Video-3-Reveal-Builds_v1.1.pptx
+++ b/deliverables/video-3-slides/out/Video-3-Reveal-Builds_v1.1.pptx
@@ -633,7 +633,7 @@
           </a:p>
           <a:p>
             <a:r>
-              <a:t>Note the direct-address framing in v3.0: Temidayo says "Say you tell me: 'I reduced the amount of time an internal process took.' That gives me an outcome." She is standing in as the listener across the table, and the example is then turned back on the viewer — "what you may have actually learned to do was…". Keep her on camera through that exchange so it reads as a conversation, not a case study.</a:t>
+              <a:t>Note the direct-address framing in v4.0: Temidayo says "Say you tell me: 'I reduced the amount of time an internal process took.' That gives me an outcome." She is standing in as the listener across the table, and the example is then turned back on the viewer — "what you may have actually learned to do was…". Keep her on camera through that exchange so it reads as a conversation, not a case study.</a:t>
             </a:r>
           </a:p>
           <a:p>
@@ -728,7 +728,7 @@
           </a:p>
           <a:p>
             <a:r>
-              <a:t>Note the direct-address framing in v3.0: Temidayo says "Say you tell me: 'I reduced the amount of time an internal process took.' That gives me an outcome." She is standing in as the listener across the table, and the example is then turned back on the viewer — "what you may have actually learned to do was…". Keep her on camera through that exchange so it reads as a conversation, not a case study.</a:t>
+              <a:t>Note the direct-address framing in v4.0: Temidayo says "Say you tell me: 'I reduced the amount of time an internal process took.' That gives me an outcome." She is standing in as the listener across the table, and the example is then turned back on the viewer — "what you may have actually learned to do was…". Keep her on camera through that exchange so it reads as a conversation, not a case study.</a:t>
             </a:r>
           </a:p>
           <a:p>
@@ -823,7 +823,7 @@
           </a:p>
           <a:p>
             <a:r>
-              <a:t>Note the direct-address framing in v3.0: Temidayo says "Say you tell me: 'I reduced the amount of time an internal process took.' That gives me an outcome." She is standing in as the listener across the table, and the example is then turned back on the viewer — "what you may have actually learned to do was…". Keep her on camera through that exchange so it reads as a conversation, not a case study.</a:t>
+              <a:t>Note the direct-address framing in v4.0: Temidayo says "Say you tell me: 'I reduced the amount of time an internal process took.' That gives me an outcome." She is standing in as the listener across the table, and the example is then turned back on the viewer — "what you may have actually learned to do was…". Keep her on camera through that exchange so it reads as a conversation, not a case study.</a:t>
             </a:r>
           </a:p>
           <a:p>
@@ -918,7 +918,7 @@
           </a:p>
           <a:p>
             <a:r>
-              <a:t>Note the direct-address framing in v3.0: Temidayo says "Say you tell me: 'I reduced the amount of time an internal process took.' That gives me an outcome." She is standing in as the listener across the table, and the example is then turned back on the viewer — "what you may have actually learned to do was…". Keep her on camera through that exchange so it reads as a conversation, not a case study.</a:t>
+              <a:t>Note the direct-address framing in v4.0: Temidayo says "Say you tell me: 'I reduced the amount of time an internal process took.' That gives me an outcome." She is standing in as the listener across the table, and the example is then turned back on the viewer — "what you may have actually learned to do was…". Keep her on camera through that exchange so it reads as a conversation, not a case study.</a:t>
             </a:r>
           </a:p>
           <a:p>
@@ -1673,7 +1673,7 @@
           </a:p>
           <a:p>
             <a:r>
-              <a:t>Say the line as written, in its v3.0 form: "I am not trying to make your decision slow. I am trying to make it legible to you."</a:t>
+              <a:t>Say the line as written, in its v4.0 form: "I am not trying to make your decision slow. I am trying to make it legible to you."</a:t>
             </a:r>
           </a:p>
           <a:p>
@@ -1768,7 +1768,7 @@
           </a:p>
           <a:p>
             <a:r>
-              <a:t>Say the line as written, in its v3.0 form: "I am not trying to make your decision slow. I am trying to make it legible to you."</a:t>
+              <a:t>Say the line as written, in its v4.0 form: "I am not trying to make your decision slow. I am trying to make it legible to you."</a:t>
             </a:r>
           </a:p>
           <a:p>
@@ -1863,7 +1863,7 @@
           </a:p>
           <a:p>
             <a:r>
-              <a:t>Say the line as written, in its v3.0 form: "I am not trying to make your decision slow. I am trying to make it legible to you."</a:t>
+              <a:t>Say the line as written, in its v4.0 form: "I am not trying to make your decision slow. I am trying to make it legible to you."</a:t>
             </a:r>
           </a:p>
           <a:p>
@@ -2223,7 +2223,7 @@
           </a:p>
           <a:p>
             <a:r>
-              <a:t>Note the v3.0 phrasing: "that is what I made the Career Decision Evidence Check for." It is offered, not announced. Keep it that way.</a:t>
+              <a:t>Note the v4.0 phrasing: "that is what I made the Career Decision Evidence Check for." It is offered, not announced. Keep it that way.</a:t>
             </a:r>
           </a:p>
           <a:p>
@@ -2968,7 +2968,7 @@
           </a:p>
           <a:p>
             <a:r>
-              <a:t>Note the direct-address framing in v3.0: Temidayo says "Say you tell me: 'I reduced the amount of time an internal process took.' That gives me an outcome." She is standing in as the listener across the table, and the example is then turned back on the viewer — "what you may have actually learned to do was…". Keep her on camera through that exchange so it reads as a conversation, not a case study.</a:t>
+              <a:t>Note the direct-address framing in v4.0: Temidayo says "Say you tell me: 'I reduced the amount of time an internal process took.' That gives me an outcome." She is standing in as the listener across the table, and the example is then turned back on the viewer — "what you may have actually learned to do was…". Keep her on camera through that exchange so it reads as a conversation, not a case study.</a:t>
             </a:r>
           </a:p>
           <a:p>

--- a/deliverables/video-3-slides/out/Video-3-Reveal-Builds_v1.1.pptx
+++ b/deliverables/video-3-slides/out/Video-3-Reveal-Builds_v1.1.pptx
@@ -533,22 +533,22 @@
           </a:p>
           <a:p>
             <a:r>
-              <a:t>Timing: approximately 0:37 to 0:55.</a:t>
-            </a:r>
-          </a:p>
-          <a:p>
-            <a:r>
-              <a:t>Do NOT open on this slide. Begin full-screen on Temidayo and let the opening land first: the hook, the three-check promise, her own perspective on documented performance and talent systems, and the safety line.</a:t>
-            </a:r>
-          </a:p>
-          <a:p>
-            <a:r>
-              <a:t>Bring the title up under the channel line: "I'm Temidayo Afonja. I help experienced professionals understand what they can carry from their work into whatever comes next, without assuming they have to start from zero. And that is what I want to help you do before you hand in your notice."</a:t>
-            </a:r>
-          </a:p>
-          <a:p>
-            <a:r>
-              <a:t>That second sentence is the turn from positioning to relationship. Stay on her face for it.</a:t>
+              <a:t>Timing: approximately 0:31 to 0:48.</a:t>
+            </a:r>
+          </a:p>
+          <a:p>
+            <a:r>
+              <a:t>Do NOT open on this slide. Begin full-screen on Temidayo. The first thing the viewer must hear is that this is not a video trying to keep them in their job.</a:t>
+            </a:r>
+          </a:p>
+          <a:p>
+            <a:r>
+              <a:t>"I am not going to try to talk you out of it." Then the refusal to pretend she knows their situation. Then the real cost: people leave carrying much less than they earned.</a:t>
+            </a:r>
+          </a:p>
+          <a:p>
+            <a:r>
+              <a:t>Bring the title up briefly, then go straight to the safety boundary. Do not put anything between them.</a:t>
             </a:r>
           </a:p>
         </p:txBody>
@@ -623,17 +623,17 @@
           </a:p>
           <a:p>
             <a:r>
-              <a:t>Timing: approximately 3:12.</a:t>
-            </a:r>
-          </a:p>
-          <a:p>
-            <a:r>
-              <a:t>Reveal the four prompts one at a time as each is named.</a:t>
-            </a:r>
-          </a:p>
-          <a:p>
-            <a:r>
-              <a:t>Note the direct-address framing in v4.0: Temidayo says "Say you tell me: 'I reduced the amount of time an internal process took.' That gives me an outcome." She is standing in as the listener across the table, and the example is then turned back on the viewer — "what you may have actually learned to do was…". Keep her on camera through that exchange so it reads as a conversation, not a case study.</a:t>
+              <a:t>Timing: approximately 3:57.</a:t>
+            </a:r>
+          </a:p>
+          <a:p>
+            <a:r>
+              <a:t>Reveal the four prompts one at a time.</a:t>
+            </a:r>
+          </a:p>
+          <a:p>
+            <a:r>
+              <a:t>Temidayo stands in as the listener — "Say you tell me: I reduced the time an internal process took. That gives me a result. Fine." Keep her on camera so it reads as a conversation, not a case study.</a:t>
             </a:r>
           </a:p>
           <a:p>
@@ -643,7 +643,7 @@
           </a:p>
           <a:p>
             <a:r>
-              <a:t>Close on the two questions she hands the viewer: what did your work prove you can now do, and where else could that be useful?</a:t>
+              <a:t>Close on the two questions she hands over: what did this chapter prove you can do, and where else would that be needed?</a:t>
             </a:r>
           </a:p>
         </p:txBody>
@@ -718,17 +718,17 @@
           </a:p>
           <a:p>
             <a:r>
-              <a:t>Timing: approximately 3:12.</a:t>
-            </a:r>
-          </a:p>
-          <a:p>
-            <a:r>
-              <a:t>Reveal the four prompts one at a time as each is named.</a:t>
-            </a:r>
-          </a:p>
-          <a:p>
-            <a:r>
-              <a:t>Note the direct-address framing in v4.0: Temidayo says "Say you tell me: 'I reduced the amount of time an internal process took.' That gives me an outcome." She is standing in as the listener across the table, and the example is then turned back on the viewer — "what you may have actually learned to do was…". Keep her on camera through that exchange so it reads as a conversation, not a case study.</a:t>
+              <a:t>Timing: approximately 3:57.</a:t>
+            </a:r>
+          </a:p>
+          <a:p>
+            <a:r>
+              <a:t>Reveal the four prompts one at a time.</a:t>
+            </a:r>
+          </a:p>
+          <a:p>
+            <a:r>
+              <a:t>Temidayo stands in as the listener — "Say you tell me: I reduced the time an internal process took. That gives me a result. Fine." Keep her on camera so it reads as a conversation, not a case study.</a:t>
             </a:r>
           </a:p>
           <a:p>
@@ -738,7 +738,7 @@
           </a:p>
           <a:p>
             <a:r>
-              <a:t>Close on the two questions she hands the viewer: what did your work prove you can now do, and where else could that be useful?</a:t>
+              <a:t>Close on the two questions she hands over: what did this chapter prove you can do, and where else would that be needed?</a:t>
             </a:r>
           </a:p>
         </p:txBody>
@@ -813,17 +813,17 @@
           </a:p>
           <a:p>
             <a:r>
-              <a:t>Timing: approximately 3:12.</a:t>
-            </a:r>
-          </a:p>
-          <a:p>
-            <a:r>
-              <a:t>Reveal the four prompts one at a time as each is named.</a:t>
-            </a:r>
-          </a:p>
-          <a:p>
-            <a:r>
-              <a:t>Note the direct-address framing in v4.0: Temidayo says "Say you tell me: 'I reduced the amount of time an internal process took.' That gives me an outcome." She is standing in as the listener across the table, and the example is then turned back on the viewer — "what you may have actually learned to do was…". Keep her on camera through that exchange so it reads as a conversation, not a case study.</a:t>
+              <a:t>Timing: approximately 3:57.</a:t>
+            </a:r>
+          </a:p>
+          <a:p>
+            <a:r>
+              <a:t>Reveal the four prompts one at a time.</a:t>
+            </a:r>
+          </a:p>
+          <a:p>
+            <a:r>
+              <a:t>Temidayo stands in as the listener — "Say you tell me: I reduced the time an internal process took. That gives me a result. Fine." Keep her on camera so it reads as a conversation, not a case study.</a:t>
             </a:r>
           </a:p>
           <a:p>
@@ -833,7 +833,7 @@
           </a:p>
           <a:p>
             <a:r>
-              <a:t>Close on the two questions she hands the viewer: what did your work prove you can now do, and where else could that be useful?</a:t>
+              <a:t>Close on the two questions she hands over: what did this chapter prove you can do, and where else would that be needed?</a:t>
             </a:r>
           </a:p>
         </p:txBody>
@@ -908,17 +908,17 @@
           </a:p>
           <a:p>
             <a:r>
-              <a:t>Timing: approximately 3:12.</a:t>
-            </a:r>
-          </a:p>
-          <a:p>
-            <a:r>
-              <a:t>Reveal the four prompts one at a time as each is named.</a:t>
-            </a:r>
-          </a:p>
-          <a:p>
-            <a:r>
-              <a:t>Note the direct-address framing in v4.0: Temidayo says "Say you tell me: 'I reduced the amount of time an internal process took.' That gives me an outcome." She is standing in as the listener across the table, and the example is then turned back on the viewer — "what you may have actually learned to do was…". Keep her on camera through that exchange so it reads as a conversation, not a case study.</a:t>
+              <a:t>Timing: approximately 3:57.</a:t>
+            </a:r>
+          </a:p>
+          <a:p>
+            <a:r>
+              <a:t>Reveal the four prompts one at a time.</a:t>
+            </a:r>
+          </a:p>
+          <a:p>
+            <a:r>
+              <a:t>Temidayo stands in as the listener — "Say you tell me: I reduced the time an internal process took. That gives me a result. Fine." Keep her on camera so it reads as a conversation, not a case study.</a:t>
             </a:r>
           </a:p>
           <a:p>
@@ -928,7 +928,7 @@
           </a:p>
           <a:p>
             <a:r>
-              <a:t>Close on the two questions she hands the viewer: what did your work prove you can now do, and where else could that be useful?</a:t>
+              <a:t>Close on the two questions she hands over: what did this chapter prove you can do, and where else would that be needed?</a:t>
             </a:r>
           </a:p>
         </p:txBody>
@@ -1003,12 +1003,12 @@
           </a:p>
           <a:p>
             <a:r>
-              <a:t>Timing: approximately 4:23, holding to about 4:27.</a:t>
-            </a:r>
-          </a:p>
-          <a:p>
-            <a:r>
-              <a:t>Section card. Hold briefly, then return to presenter.</a:t>
+              <a:t>Timing: approximately 5:15, holding to about 5:19.</a:t>
+            </a:r>
+          </a:p>
+          <a:p>
+            <a:r>
+              <a:t>Section card. Hold briefly, then back to presenter.</a:t>
             </a:r>
           </a:p>
         </p:txBody>
@@ -1083,7 +1083,7 @@
           </a:p>
           <a:p>
             <a:r>
-              <a:t>Timing: approximately 4:27.</a:t>
+              <a:t>Timing: approximately 5:19.</a:t>
             </a:r>
           </a:p>
           <a:p>
@@ -1093,17 +1093,17 @@
           </a:p>
           <a:p>
             <a:r>
-              <a:t>The two kinds of reset both need room. A deliberate learning curve can be a very good decision; the risk is repeating the same work behind a new logo.</a:t>
-            </a:r>
-          </a:p>
-          <a:p>
-            <a:r>
-              <a:t>"A new employer is not automatically a new direction for you." Let that land.</a:t>
-            </a:r>
-          </a:p>
-          <a:p>
-            <a:r>
-              <a:t>Nothing here should read as discouragement from leaving.</a:t>
+              <a:t>Both kinds of reset need room. The deliberate one is endorsed — "That can be an excellent decision. I have made it." The trap is the one where the logo changed and the problems did not.</a:t>
+            </a:r>
+          </a:p>
+          <a:p>
+            <a:r>
+              <a:t>"A new employer is not automatically a new direction." Let it land.</a:t>
+            </a:r>
+          </a:p>
+          <a:p>
+            <a:r>
+              <a:t>Nothing here may read as discouragement from leaving.</a:t>
             </a:r>
           </a:p>
         </p:txBody>
@@ -1178,7 +1178,7 @@
           </a:p>
           <a:p>
             <a:r>
-              <a:t>Timing: approximately 4:27.</a:t>
+              <a:t>Timing: approximately 5:19.</a:t>
             </a:r>
           </a:p>
           <a:p>
@@ -1188,17 +1188,17 @@
           </a:p>
           <a:p>
             <a:r>
-              <a:t>The two kinds of reset both need room. A deliberate learning curve can be a very good decision; the risk is repeating the same work behind a new logo.</a:t>
-            </a:r>
-          </a:p>
-          <a:p>
-            <a:r>
-              <a:t>"A new employer is not automatically a new direction for you." Let that land.</a:t>
-            </a:r>
-          </a:p>
-          <a:p>
-            <a:r>
-              <a:t>Nothing here should read as discouragement from leaving.</a:t>
+              <a:t>Both kinds of reset need room. The deliberate one is endorsed — "That can be an excellent decision. I have made it." The trap is the one where the logo changed and the problems did not.</a:t>
+            </a:r>
+          </a:p>
+          <a:p>
+            <a:r>
+              <a:t>"A new employer is not automatically a new direction." Let it land.</a:t>
+            </a:r>
+          </a:p>
+          <a:p>
+            <a:r>
+              <a:t>Nothing here may read as discouragement from leaving.</a:t>
             </a:r>
           </a:p>
         </p:txBody>
@@ -1273,7 +1273,7 @@
           </a:p>
           <a:p>
             <a:r>
-              <a:t>Timing: approximately 4:27.</a:t>
+              <a:t>Timing: approximately 5:19.</a:t>
             </a:r>
           </a:p>
           <a:p>
@@ -1283,17 +1283,17 @@
           </a:p>
           <a:p>
             <a:r>
-              <a:t>The two kinds of reset both need room. A deliberate learning curve can be a very good decision; the risk is repeating the same work behind a new logo.</a:t>
-            </a:r>
-          </a:p>
-          <a:p>
-            <a:r>
-              <a:t>"A new employer is not automatically a new direction for you." Let that land.</a:t>
-            </a:r>
-          </a:p>
-          <a:p>
-            <a:r>
-              <a:t>Nothing here should read as discouragement from leaving.</a:t>
+              <a:t>Both kinds of reset need room. The deliberate one is endorsed — "That can be an excellent decision. I have made it." The trap is the one where the logo changed and the problems did not.</a:t>
+            </a:r>
+          </a:p>
+          <a:p>
+            <a:r>
+              <a:t>"A new employer is not automatically a new direction." Let it land.</a:t>
+            </a:r>
+          </a:p>
+          <a:p>
+            <a:r>
+              <a:t>Nothing here may read as discouragement from leaving.</a:t>
             </a:r>
           </a:p>
         </p:txBody>
@@ -1368,7 +1368,7 @@
           </a:p>
           <a:p>
             <a:r>
-              <a:t>Timing: approximately 4:27.</a:t>
+              <a:t>Timing: approximately 5:19.</a:t>
             </a:r>
           </a:p>
           <a:p>
@@ -1378,17 +1378,17 @@
           </a:p>
           <a:p>
             <a:r>
-              <a:t>The two kinds of reset both need room. A deliberate learning curve can be a very good decision; the risk is repeating the same work behind a new logo.</a:t>
-            </a:r>
-          </a:p>
-          <a:p>
-            <a:r>
-              <a:t>"A new employer is not automatically a new direction for you." Let that land.</a:t>
-            </a:r>
-          </a:p>
-          <a:p>
-            <a:r>
-              <a:t>Nothing here should read as discouragement from leaving.</a:t>
+              <a:t>Both kinds of reset need room. The deliberate one is endorsed — "That can be an excellent decision. I have made it." The trap is the one where the logo changed and the problems did not.</a:t>
+            </a:r>
+          </a:p>
+          <a:p>
+            <a:r>
+              <a:t>"A new employer is not automatically a new direction." Let it land.</a:t>
+            </a:r>
+          </a:p>
+          <a:p>
+            <a:r>
+              <a:t>Nothing here may read as discouragement from leaving.</a:t>
             </a:r>
           </a:p>
         </p:txBody>
@@ -1463,22 +1463,22 @@
           </a:p>
           <a:p>
             <a:r>
-              <a:t>Timing: approximately 5:32.</a:t>
-            </a:r>
-          </a:p>
-          <a:p>
-            <a:r>
-              <a:t>The consolidation card. Reveal the three in order.</a:t>
-            </a:r>
-          </a:p>
-          <a:p>
-            <a:r>
-              <a:t>"In that order. Not because leaving is wrong." That qualifier is load-bearing — this video is not three reasons to stay. Do not cut it.</a:t>
-            </a:r>
-          </a:p>
-          <a:p>
-            <a:r>
-              <a:t>Do not add a fourth item, an acronym or a slogan. The three checks are the only memory device in this video.</a:t>
+              <a:t>Timing: approximately 6:33.</a:t>
+            </a:r>
+          </a:p>
+          <a:p>
+            <a:r>
+              <a:t>The consolidation card. Reveal the three checks in order.</a:t>
+            </a:r>
+          </a:p>
+          <a:p>
+            <a:r>
+              <a:t>"In that order. Not because leaving is wrong." That qualifier is load-bearing. Do not cut it.</a:t>
+            </a:r>
+          </a:p>
+          <a:p>
+            <a:r>
+              <a:t>No fourth item, no acronym, no slogan.</a:t>
             </a:r>
           </a:p>
         </p:txBody>
@@ -1553,37 +1553,32 @@
           </a:p>
           <a:p>
             <a:r>
-              <a:t>Timing: approximately 0:55.</a:t>
-            </a:r>
-          </a:p>
-          <a:p>
-            <a:r>
-              <a:t>Speak from ideas, calmly. The point is timing, not fear.</a:t>
-            </a:r>
-          </a:p>
-          <a:p>
-            <a:r>
-              <a:t>STATE THE SAFETY BOUNDARY OUT LOUD, IN FULL, AND DO NOT SOFTEN IT:</a:t>
-            </a:r>
-          </a:p>
-          <a:p>
-            <a:r>
-              <a:t>"If your health or safety is at risk, or you are dealing with harassment, discrimination or another urgent threat, nothing in this video is a reason to delay leaving. Act on that first."</a:t>
-            </a:r>
-          </a:p>
-          <a:p>
-            <a:r>
-              <a:t>Deliver it humanely and directly. It is not a legal disclaimer and must not be edited to look like one — no fine print, no red alarm graphic, no cutaway.</a:t>
-            </a:r>
-          </a:p>
-          <a:p>
-            <a:r>
-              <a:t>Then return to the viewer who has time to think, and say plainly that the rest of the video is for them.</a:t>
-            </a:r>
-          </a:p>
-          <a:p>
-            <a:r>
-              <a:t>The closing beat of this section is addressed straight at the viewer: "I am not trying to make you hesitate. I am trying to make sure you do not leave the meaning of your own experience behind." </a:t>
+              <a:t>Timing: approximately 0:48.</a:t>
+            </a:r>
+          </a:p>
+          <a:p>
+            <a:r>
+              <a:t>THE SAFETY BOUNDARY COMES FIRST, IN FULL, AND IS NOT NEGOTIABLE:</a:t>
+            </a:r>
+          </a:p>
+          <a:p>
+            <a:r>
+              <a:t>"If your health or your safety is at risk, or you are dealing with harassment or discrimination, nothing in this video is a reason to wait. Get yourself out and get proper support. None of what follows is worth a single week of that."</a:t>
+            </a:r>
+          </a:p>
+          <a:p>
+            <a:r>
+              <a:t>Deliver it plainly and humanely, on camera, with captions. It is not a legal disclaimer and must not be edited to look like one — no fine print, no red alarm graphic, no cutaway.</a:t>
+            </a:r>
+          </a:p>
+          <a:p>
+            <a:r>
+              <a:t>Then the access explanation. The tone is practical, not ominous: afterwards it is not impossible, just harder and slower and dependent on memory.</a:t>
+            </a:r>
+          </a:p>
+          <a:p>
+            <a:r>
+              <a:t>The belonging beat sits here — her own crossings, the relearning, and what she has watched happen to capable people. NO personal job-loss story is established and none is used. Do not let a visual imply one.</a:t>
             </a:r>
           </a:p>
         </p:txBody>
@@ -1658,27 +1653,22 @@
           </a:p>
           <a:p>
             <a:r>
-              <a:t>Timing: approximately 5:51.</a:t>
-            </a:r>
-          </a:p>
-          <a:p>
-            <a:r>
-              <a:t>Reveal one direction at a time. Keep it provisional. Temidayo is not diagnosing the viewer and not telling them which direction is correct.</a:t>
-            </a:r>
-          </a:p>
-          <a:p>
-            <a:r>
-              <a:t>Real constraints stay in: pay, benefits, caregiving and timing legitimately affect when someone moves.</a:t>
-            </a:r>
-          </a:p>
-          <a:p>
-            <a:r>
-              <a:t>Say the line as written, in its v4.0 form: "I am not trying to make your decision slow. I am trying to make it legible to you."</a:t>
-            </a:r>
-          </a:p>
-          <a:p>
-            <a:r>
-              <a:t>The safety boundary is repeated here, briefly and plainly: a harmful situation does not need a bridge plan. Do not cut it.</a:t>
+              <a:t>Timing: approximately 6:52.</a:t>
+            </a:r>
+          </a:p>
+          <a:p>
+            <a:r>
+              <a:t>Reveal one direction at a time. Keep it provisional — she is not diagnosing the viewer or telling them which one is right.</a:t>
+            </a:r>
+          </a:p>
+          <a:p>
+            <a:r>
+              <a:t>Real life stays in: pay, benefits, caregiving, timing, where you live. The line "anyone who tells you otherwise is not being serious" protects the viewer from tidier advice elsewhere. Keep it.</a:t>
+            </a:r>
+          </a:p>
+          <a:p>
+            <a:r>
+              <a:t>The safety boundary repeats here, briefly: a harmful situation does not need a bridge plan. Do not cut it.</a:t>
             </a:r>
           </a:p>
         </p:txBody>
@@ -1753,27 +1743,22 @@
           </a:p>
           <a:p>
             <a:r>
-              <a:t>Timing: approximately 5:51.</a:t>
-            </a:r>
-          </a:p>
-          <a:p>
-            <a:r>
-              <a:t>Reveal one direction at a time. Keep it provisional. Temidayo is not diagnosing the viewer and not telling them which direction is correct.</a:t>
-            </a:r>
-          </a:p>
-          <a:p>
-            <a:r>
-              <a:t>Real constraints stay in: pay, benefits, caregiving and timing legitimately affect when someone moves.</a:t>
-            </a:r>
-          </a:p>
-          <a:p>
-            <a:r>
-              <a:t>Say the line as written, in its v4.0 form: "I am not trying to make your decision slow. I am trying to make it legible to you."</a:t>
-            </a:r>
-          </a:p>
-          <a:p>
-            <a:r>
-              <a:t>The safety boundary is repeated here, briefly and plainly: a harmful situation does not need a bridge plan. Do not cut it.</a:t>
+              <a:t>Timing: approximately 6:52.</a:t>
+            </a:r>
+          </a:p>
+          <a:p>
+            <a:r>
+              <a:t>Reveal one direction at a time. Keep it provisional — she is not diagnosing the viewer or telling them which one is right.</a:t>
+            </a:r>
+          </a:p>
+          <a:p>
+            <a:r>
+              <a:t>Real life stays in: pay, benefits, caregiving, timing, where you live. The line "anyone who tells you otherwise is not being serious" protects the viewer from tidier advice elsewhere. Keep it.</a:t>
+            </a:r>
+          </a:p>
+          <a:p>
+            <a:r>
+              <a:t>The safety boundary repeats here, briefly: a harmful situation does not need a bridge plan. Do not cut it.</a:t>
             </a:r>
           </a:p>
         </p:txBody>
@@ -1848,27 +1833,22 @@
           </a:p>
           <a:p>
             <a:r>
-              <a:t>Timing: approximately 5:51.</a:t>
-            </a:r>
-          </a:p>
-          <a:p>
-            <a:r>
-              <a:t>Reveal one direction at a time. Keep it provisional. Temidayo is not diagnosing the viewer and not telling them which direction is correct.</a:t>
-            </a:r>
-          </a:p>
-          <a:p>
-            <a:r>
-              <a:t>Real constraints stay in: pay, benefits, caregiving and timing legitimately affect when someone moves.</a:t>
-            </a:r>
-          </a:p>
-          <a:p>
-            <a:r>
-              <a:t>Say the line as written, in its v4.0 form: "I am not trying to make your decision slow. I am trying to make it legible to you."</a:t>
-            </a:r>
-          </a:p>
-          <a:p>
-            <a:r>
-              <a:t>The safety boundary is repeated here, briefly and plainly: a harmful situation does not need a bridge plan. Do not cut it.</a:t>
+              <a:t>Timing: approximately 6:52.</a:t>
+            </a:r>
+          </a:p>
+          <a:p>
+            <a:r>
+              <a:t>Reveal one direction at a time. Keep it provisional — she is not diagnosing the viewer or telling them which one is right.</a:t>
+            </a:r>
+          </a:p>
+          <a:p>
+            <a:r>
+              <a:t>Real life stays in: pay, benefits, caregiving, timing, where you live. The line "anyone who tells you otherwise is not being serious" protects the viewer from tidier advice elsewhere. Keep it.</a:t>
+            </a:r>
+          </a:p>
+          <a:p>
+            <a:r>
+              <a:t>The safety boundary repeats here, briefly: a harmful situation does not need a bridge plan. Do not cut it.</a:t>
             </a:r>
           </a:p>
         </p:txBody>
@@ -1943,22 +1923,22 @@
           </a:p>
           <a:p>
             <a:r>
-              <a:t>Timing: approximately 7:07.</a:t>
-            </a:r>
-          </a:p>
-          <a:p>
-            <a:r>
-              <a:t>Reveal the three questions one at a time.</a:t>
-            </a:r>
-          </a:p>
-          <a:p>
-            <a:r>
-              <a:t>The instruction is concrete and directed at the viewer: do not keep the answers only in your head, write them down.</a:t>
-            </a:r>
-          </a:p>
-          <a:p>
-            <a:r>
-              <a:t>Close on the three sentences she wants them to be able to say — what I handled, what I became able to do, what I need next. Stay on Temidayo for those.</a:t>
+              <a:t>Timing: approximately 8:08.</a:t>
+            </a:r>
+          </a:p>
+          <a:p>
+            <a:r>
+              <a:t>Reveal the three questions one at a time. The instruction is concrete: write them down, do not keep them in your head.</a:t>
+            </a:r>
+          </a:p>
+          <a:p>
+            <a:r>
+              <a:t>IDENTITY EXIT, at about 8:42: "I want you to become someone who closes a chapter properly. Who walks out knowing what it built, what evidence stands behind it, and what the next thing needs to use and needs to grow."</a:t>
+            </a:r>
+          </a:p>
+          <a:p>
+            <a:r>
+              <a:t>Then the widening line — do that once and you never arrive at a decision like this empty-handed again. That is the point of the video. If the edit runs long, cut something else.</a:t>
             </a:r>
           </a:p>
         </p:txBody>
@@ -2033,22 +2013,22 @@
           </a:p>
           <a:p>
             <a:r>
-              <a:t>Timing: approximately 7:07.</a:t>
-            </a:r>
-          </a:p>
-          <a:p>
-            <a:r>
-              <a:t>Reveal the three questions one at a time.</a:t>
-            </a:r>
-          </a:p>
-          <a:p>
-            <a:r>
-              <a:t>The instruction is concrete and directed at the viewer: do not keep the answers only in your head, write them down.</a:t>
-            </a:r>
-          </a:p>
-          <a:p>
-            <a:r>
-              <a:t>Close on the three sentences she wants them to be able to say — what I handled, what I became able to do, what I need next. Stay on Temidayo for those.</a:t>
+              <a:t>Timing: approximately 8:08.</a:t>
+            </a:r>
+          </a:p>
+          <a:p>
+            <a:r>
+              <a:t>Reveal the three questions one at a time. The instruction is concrete: write them down, do not keep them in your head.</a:t>
+            </a:r>
+          </a:p>
+          <a:p>
+            <a:r>
+              <a:t>IDENTITY EXIT, at about 8:42: "I want you to become someone who closes a chapter properly. Who walks out knowing what it built, what evidence stands behind it, and what the next thing needs to use and needs to grow."</a:t>
+            </a:r>
+          </a:p>
+          <a:p>
+            <a:r>
+              <a:t>Then the widening line — do that once and you never arrive at a decision like this empty-handed again. That is the point of the video. If the edit runs long, cut something else.</a:t>
             </a:r>
           </a:p>
         </p:txBody>
@@ -2123,22 +2103,22 @@
           </a:p>
           <a:p>
             <a:r>
-              <a:t>Timing: approximately 7:07.</a:t>
-            </a:r>
-          </a:p>
-          <a:p>
-            <a:r>
-              <a:t>Reveal the three questions one at a time.</a:t>
-            </a:r>
-          </a:p>
-          <a:p>
-            <a:r>
-              <a:t>The instruction is concrete and directed at the viewer: do not keep the answers only in your head, write them down.</a:t>
-            </a:r>
-          </a:p>
-          <a:p>
-            <a:r>
-              <a:t>Close on the three sentences she wants them to be able to say — what I handled, what I became able to do, what I need next. Stay on Temidayo for those.</a:t>
+              <a:t>Timing: approximately 8:08.</a:t>
+            </a:r>
+          </a:p>
+          <a:p>
+            <a:r>
+              <a:t>Reveal the three questions one at a time. The instruction is concrete: write them down, do not keep them in your head.</a:t>
+            </a:r>
+          </a:p>
+          <a:p>
+            <a:r>
+              <a:t>IDENTITY EXIT, at about 8:42: "I want you to become someone who closes a chapter properly. Who walks out knowing what it built, what evidence stands behind it, and what the next thing needs to use and needs to grow."</a:t>
+            </a:r>
+          </a:p>
+          <a:p>
+            <a:r>
+              <a:t>Then the widening line — do that once and you never arrive at a decision like this empty-handed again. That is the point of the video. If the edit runs long, cut something else.</a:t>
             </a:r>
           </a:p>
         </p:txBody>
@@ -2213,22 +2193,27 @@
           </a:p>
           <a:p>
             <a:r>
-              <a:t>Timing: approximately 7:50.</a:t>
-            </a:r>
-          </a:p>
-          <a:p>
-            <a:r>
-              <a:t>Calm and brief. This is the only invitation in the video, and it is the Career Decision Evidence Check — not the Field Kit, not Keep the Proof, not the Career Evidence Starter.</a:t>
-            </a:r>
-          </a:p>
-          <a:p>
-            <a:r>
-              <a:t>Note the v4.0 phrasing: "that is what I made the Career Decision Evidence Check for." It is offered, not announced. Keep it that way.</a:t>
-            </a:r>
-          </a:p>
-          <a:p>
-            <a:r>
-              <a:t>CTA PRODUCTION GATE: SATISFIED. The page is live. One signed-out production check is still required before Video 3 is uploaded or scheduled: confirm it loads for a visitor who is not signed in and is not holding a preview link.</a:t>
+              <a:t>Timing: approximately 9:11.</a:t>
+            </a:r>
+          </a:p>
+          <a:p>
+            <a:r>
+              <a:t>Calm and brief. The only invitation in the video, and it is the Career Decision Evidence Check — not the Field Kit, not Keep the Proof, not the Starter.</a:t>
+            </a:r>
+          </a:p>
+          <a:p>
+            <a:r>
+              <a:t>It lands AFTER the identity bridge. Keep that order.</a:t>
+            </a:r>
+          </a:p>
+          <a:p>
+            <a:r>
+              <a:t>Note the phrasing: "that is exactly what I made the Career Decision Evidence Check for." Offered, not announced.</a:t>
+            </a:r>
+          </a:p>
+          <a:p>
+            <a:r>
+              <a:t>CTA PRODUCTION GATE: SATISFIED. The page is live. One signed-out production check is still required before upload or scheduling.</a:t>
             </a:r>
           </a:p>
         </p:txBody>
@@ -2303,22 +2288,22 @@
           </a:p>
           <a:p>
             <a:r>
-              <a:t>Timing: approximately 8:14 to the end, about 8:37.</a:t>
-            </a:r>
-          </a:p>
-          <a:p>
-            <a:r>
-              <a:t>If the move changes role, function, employer or industry, this is the video that answers what carries across. The card reads "How to Change Jobs Without Starting Your Career Over", which is the locked Video 1 title and matches what Temidayo says.</a:t>
-            </a:r>
-          </a:p>
-          <a:p>
-            <a:r>
-              <a:t>Closing line: "Because leaving one job should not require you to erase everything your work has already built in you."</a:t>
-            </a:r>
-          </a:p>
-          <a:p>
-            <a:r>
-              <a:t>Do not summarize this video again.</a:t>
+              <a:t>Timing: approximately 9:35 to the end, about 9:58.</a:t>
+            </a:r>
+          </a:p>
+          <a:p>
+            <a:r>
+              <a:t>The card reads "How to Change Jobs Without Starting Your Career Over", the locked Video 1 title, matching what Temidayo says.</a:t>
+            </a:r>
+          </a:p>
+          <a:p>
+            <a:r>
+              <a:t>Closing line: "Leaving one job should not cost you everything the work built in you." Stay on her for it.</a:t>
+            </a:r>
+          </a:p>
+          <a:p>
+            <a:r>
+              <a:t>Do not summarize the video again.</a:t>
             </a:r>
           </a:p>
           <a:p>
@@ -2398,12 +2383,17 @@
           </a:p>
           <a:p>
             <a:r>
-              <a:t>Timing: approximately 2:01, holding to about 2:04.</a:t>
-            </a:r>
-          </a:p>
-          <a:p>
-            <a:r>
-              <a:t>Section card. Hold briefly, then return to presenter.</a:t>
+              <a:t>Timing: approximately 2:35, holding to about 2:38.</a:t>
+            </a:r>
+          </a:p>
+          <a:p>
+            <a:r>
+              <a:t>Section card. Hold briefly, then back to presenter.</a:t>
+            </a:r>
+          </a:p>
+          <a:p>
+            <a:r>
+              <a:t>The framework does not arrive until here, at over two and a half minutes. That is deliberate.</a:t>
             </a:r>
           </a:p>
         </p:txBody>
@@ -2478,32 +2468,32 @@
           </a:p>
           <a:p>
             <a:r>
-              <a:t>Timing: approximately 2:04.</a:t>
-            </a:r>
-          </a:p>
-          <a:p>
-            <a:r>
-              <a:t>Reveal the left column two items at a time, then bring up the boundary column.</a:t>
-            </a:r>
-          </a:p>
-          <a:p>
-            <a:r>
-              <a:t>Say the boundary plainly. Confidential information, customer data, employee data, proprietary documents and anything the employer owns stay with the employer. Preserving your record does not mean taking their material.</a:t>
-            </a:r>
-          </a:p>
-          <a:p>
-            <a:r>
-              <a:t>The test to say out loud: if you do not have the right to keep it, do not take it.</a:t>
-            </a:r>
-          </a:p>
-          <a:p>
-            <a:r>
-              <a:t>Then give the shape of the record itself, spoken, not on the slide: the starting condition, what you decided or influenced, what changed, and what permitted evidence supports that result.</a:t>
-            </a:r>
-          </a:p>
-          <a:p>
-            <a:r>
-              <a:t>Nothing here needs a screenshot of an employer system. Close on the reassurance that a filing cabinet is not the goal — enough context to explain the work six months later is.</a:t>
+              <a:t>Timing: approximately 2:38.</a:t>
+            </a:r>
+          </a:p>
+          <a:p>
+            <a:r>
+              <a:t>Reveal what is yours to keep, then the boundary column.</a:t>
+            </a:r>
+          </a:p>
+          <a:p>
+            <a:r>
+              <a:t>Say the boundary plainly. Confidential information, customer data, employee data, proprietary documents, anything the employer owns — it stays with the employer.</a:t>
+            </a:r>
+          </a:p>
+          <a:p>
+            <a:r>
+              <a:t>The rule to say out loud: if you do not have the right to keep it, do not take it.</a:t>
+            </a:r>
+          </a:p>
+          <a:p>
+            <a:r>
+              <a:t>Then the four lines: where it started, what you decided or influenced, what changed, what permitted evidence supports it.</a:t>
+            </a:r>
+          </a:p>
+          <a:p>
+            <a:r>
+              <a:t>Close on why this one is first: do it while you can still check.</a:t>
             </a:r>
           </a:p>
         </p:txBody>
@@ -2578,32 +2568,32 @@
           </a:p>
           <a:p>
             <a:r>
-              <a:t>Timing: approximately 2:04.</a:t>
-            </a:r>
-          </a:p>
-          <a:p>
-            <a:r>
-              <a:t>Reveal the left column two items at a time, then bring up the boundary column.</a:t>
-            </a:r>
-          </a:p>
-          <a:p>
-            <a:r>
-              <a:t>Say the boundary plainly. Confidential information, customer data, employee data, proprietary documents and anything the employer owns stay with the employer. Preserving your record does not mean taking their material.</a:t>
-            </a:r>
-          </a:p>
-          <a:p>
-            <a:r>
-              <a:t>The test to say out loud: if you do not have the right to keep it, do not take it.</a:t>
-            </a:r>
-          </a:p>
-          <a:p>
-            <a:r>
-              <a:t>Then give the shape of the record itself, spoken, not on the slide: the starting condition, what you decided or influenced, what changed, and what permitted evidence supports that result.</a:t>
-            </a:r>
-          </a:p>
-          <a:p>
-            <a:r>
-              <a:t>Nothing here needs a screenshot of an employer system. Close on the reassurance that a filing cabinet is not the goal — enough context to explain the work six months later is.</a:t>
+              <a:t>Timing: approximately 2:38.</a:t>
+            </a:r>
+          </a:p>
+          <a:p>
+            <a:r>
+              <a:t>Reveal what is yours to keep, then the boundary column.</a:t>
+            </a:r>
+          </a:p>
+          <a:p>
+            <a:r>
+              <a:t>Say the boundary plainly. Confidential information, customer data, employee data, proprietary documents, anything the employer owns — it stays with the employer.</a:t>
+            </a:r>
+          </a:p>
+          <a:p>
+            <a:r>
+              <a:t>The rule to say out loud: if you do not have the right to keep it, do not take it.</a:t>
+            </a:r>
+          </a:p>
+          <a:p>
+            <a:r>
+              <a:t>Then the four lines: where it started, what you decided or influenced, what changed, what permitted evidence supports it.</a:t>
+            </a:r>
+          </a:p>
+          <a:p>
+            <a:r>
+              <a:t>Close on why this one is first: do it while you can still check.</a:t>
             </a:r>
           </a:p>
         </p:txBody>
@@ -2678,32 +2668,32 @@
           </a:p>
           <a:p>
             <a:r>
-              <a:t>Timing: approximately 2:04.</a:t>
-            </a:r>
-          </a:p>
-          <a:p>
-            <a:r>
-              <a:t>Reveal the left column two items at a time, then bring up the boundary column.</a:t>
-            </a:r>
-          </a:p>
-          <a:p>
-            <a:r>
-              <a:t>Say the boundary plainly. Confidential information, customer data, employee data, proprietary documents and anything the employer owns stay with the employer. Preserving your record does not mean taking their material.</a:t>
-            </a:r>
-          </a:p>
-          <a:p>
-            <a:r>
-              <a:t>The test to say out loud: if you do not have the right to keep it, do not take it.</a:t>
-            </a:r>
-          </a:p>
-          <a:p>
-            <a:r>
-              <a:t>Then give the shape of the record itself, spoken, not on the slide: the starting condition, what you decided or influenced, what changed, and what permitted evidence supports that result.</a:t>
-            </a:r>
-          </a:p>
-          <a:p>
-            <a:r>
-              <a:t>Nothing here needs a screenshot of an employer system. Close on the reassurance that a filing cabinet is not the goal — enough context to explain the work six months later is.</a:t>
+              <a:t>Timing: approximately 2:38.</a:t>
+            </a:r>
+          </a:p>
+          <a:p>
+            <a:r>
+              <a:t>Reveal what is yours to keep, then the boundary column.</a:t>
+            </a:r>
+          </a:p>
+          <a:p>
+            <a:r>
+              <a:t>Say the boundary plainly. Confidential information, customer data, employee data, proprietary documents, anything the employer owns — it stays with the employer.</a:t>
+            </a:r>
+          </a:p>
+          <a:p>
+            <a:r>
+              <a:t>The rule to say out loud: if you do not have the right to keep it, do not take it.</a:t>
+            </a:r>
+          </a:p>
+          <a:p>
+            <a:r>
+              <a:t>Then the four lines: where it started, what you decided or influenced, what changed, what permitted evidence supports it.</a:t>
+            </a:r>
+          </a:p>
+          <a:p>
+            <a:r>
+              <a:t>Close on why this one is first: do it while you can still check.</a:t>
             </a:r>
           </a:p>
         </p:txBody>
@@ -2778,32 +2768,32 @@
           </a:p>
           <a:p>
             <a:r>
-              <a:t>Timing: approximately 2:04.</a:t>
-            </a:r>
-          </a:p>
-          <a:p>
-            <a:r>
-              <a:t>Reveal the left column two items at a time, then bring up the boundary column.</a:t>
-            </a:r>
-          </a:p>
-          <a:p>
-            <a:r>
-              <a:t>Say the boundary plainly. Confidential information, customer data, employee data, proprietary documents and anything the employer owns stay with the employer. Preserving your record does not mean taking their material.</a:t>
-            </a:r>
-          </a:p>
-          <a:p>
-            <a:r>
-              <a:t>The test to say out loud: if you do not have the right to keep it, do not take it.</a:t>
-            </a:r>
-          </a:p>
-          <a:p>
-            <a:r>
-              <a:t>Then give the shape of the record itself, spoken, not on the slide: the starting condition, what you decided or influenced, what changed, and what permitted evidence supports that result.</a:t>
-            </a:r>
-          </a:p>
-          <a:p>
-            <a:r>
-              <a:t>Nothing here needs a screenshot of an employer system. Close on the reassurance that a filing cabinet is not the goal — enough context to explain the work six months later is.</a:t>
+              <a:t>Timing: approximately 2:38.</a:t>
+            </a:r>
+          </a:p>
+          <a:p>
+            <a:r>
+              <a:t>Reveal what is yours to keep, then the boundary column.</a:t>
+            </a:r>
+          </a:p>
+          <a:p>
+            <a:r>
+              <a:t>Say the boundary plainly. Confidential information, customer data, employee data, proprietary documents, anything the employer owns — it stays with the employer.</a:t>
+            </a:r>
+          </a:p>
+          <a:p>
+            <a:r>
+              <a:t>The rule to say out loud: if you do not have the right to keep it, do not take it.</a:t>
+            </a:r>
+          </a:p>
+          <a:p>
+            <a:r>
+              <a:t>Then the four lines: where it started, what you decided or influenced, what changed, what permitted evidence supports it.</a:t>
+            </a:r>
+          </a:p>
+          <a:p>
+            <a:r>
+              <a:t>Close on why this one is first: do it while you can still check.</a:t>
             </a:r>
           </a:p>
         </p:txBody>
@@ -2878,12 +2868,12 @@
           </a:p>
           <a:p>
             <a:r>
-              <a:t>Timing: approximately 3:07, holding to about 3:12.</a:t>
-            </a:r>
-          </a:p>
-          <a:p>
-            <a:r>
-              <a:t>Section card. Hold briefly, then return to presenter.</a:t>
+              <a:t>Timing: approximately 3:52, holding to about 3:57.</a:t>
+            </a:r>
+          </a:p>
+          <a:p>
+            <a:r>
+              <a:t>Section card. Hold briefly, then back to presenter.</a:t>
             </a:r>
           </a:p>
         </p:txBody>
@@ -2958,17 +2948,17 @@
           </a:p>
           <a:p>
             <a:r>
-              <a:t>Timing: approximately 3:12.</a:t>
-            </a:r>
-          </a:p>
-          <a:p>
-            <a:r>
-              <a:t>Reveal the four prompts one at a time as each is named.</a:t>
-            </a:r>
-          </a:p>
-          <a:p>
-            <a:r>
-              <a:t>Note the direct-address framing in v4.0: Temidayo says "Say you tell me: 'I reduced the amount of time an internal process took.' That gives me an outcome." She is standing in as the listener across the table, and the example is then turned back on the viewer — "what you may have actually learned to do was…". Keep her on camera through that exchange so it reads as a conversation, not a case study.</a:t>
+              <a:t>Timing: approximately 3:57.</a:t>
+            </a:r>
+          </a:p>
+          <a:p>
+            <a:r>
+              <a:t>Reveal the four prompts one at a time.</a:t>
+            </a:r>
+          </a:p>
+          <a:p>
+            <a:r>
+              <a:t>Temidayo stands in as the listener — "Say you tell me: I reduced the time an internal process took. That gives me a result. Fine." Keep her on camera so it reads as a conversation, not a case study.</a:t>
             </a:r>
           </a:p>
           <a:p>
@@ -2978,7 +2968,7 @@
           </a:p>
           <a:p>
             <a:r>
-              <a:t>Close on the two questions she hands the viewer: what did your work prove you can now do, and where else could that be useful?</a:t>
+              <a:t>Close on the two questions she hands over: what did this chapter prove you can do, and where else would that be needed?</a:t>
             </a:r>
           </a:p>
         </p:txBody>

--- a/deliverables/video-3-slides/out/Video-3-Reveal-Builds_v1.1.pptx
+++ b/deliverables/video-3-slides/out/Video-3-Reveal-Builds_v1.1.pptx
@@ -533,22 +533,37 @@
           </a:p>
           <a:p>
             <a:r>
-              <a:t>Timing: approximately 0:31 to 0:48.</a:t>
-            </a:r>
-          </a:p>
-          <a:p>
-            <a:r>
-              <a:t>Do NOT open on this slide. Begin full-screen on Temidayo. The first thing the viewer must hear is that this is not a video trying to keep them in their job.</a:t>
-            </a:r>
-          </a:p>
-          <a:p>
-            <a:r>
-              <a:t>"I am not going to try to talk you out of it." Then the refusal to pretend she knows their situation. Then the real cost: people leave carrying much less than they earned.</a:t>
-            </a:r>
-          </a:p>
-          <a:p>
-            <a:r>
-              <a:t>Bring the title up briefly, then go straight to the safety boundary. Do not put anything between them.</a:t>
+              <a:t>Timing: approximately 0:36.</a:t>
+            </a:r>
+          </a:p>
+          <a:p>
+            <a:r>
+              <a:t>Slide 1 — Title.</a:t>
+            </a:r>
+          </a:p>
+          <a:p>
+            <a:r>
+              <a:t>Cue — the line that lands on this slide: “I’m Temidayo Afonja.”</a:t>
+            </a:r>
+          </a:p>
+          <a:p>
+            <a:r>
+              <a:t>Do NOT open on this slide. Begin full screen on Temidayo. The opening is four beats: “You may already know”, the description of where the viewer actually is, the refusal to argue for staying, and the three things.</a:t>
+            </a:r>
+          </a:p>
+          <a:p>
+            <a:r>
+              <a:t>Bring the title card in only on “I’m Temidayo Afonja.”</a:t>
+            </a:r>
+          </a:p>
+          <a:p>
+            <a:r>
+              <a:t>SAFETY BOUNDARY, IN FULL, ON THIS SLIDE: if health or safety is at risk, or the viewer is facing harassment or discrimination, nothing here is a reason to wait. Deliver it plainly on camera with captions. It is not a legal disclaimer and must not be styled as one. Do not soften it, shorten it, move it later or cut it.</a:t>
+            </a:r>
+          </a:p>
+          <a:p>
+            <a:r>
+              <a:t>Single state. Reveal frame 1 in the build deck.</a:t>
             </a:r>
           </a:p>
         </p:txBody>
@@ -623,27 +638,37 @@
           </a:p>
           <a:p>
             <a:r>
-              <a:t>Timing: approximately 3:57.</a:t>
-            </a:r>
-          </a:p>
-          <a:p>
-            <a:r>
-              <a:t>Reveal the four prompts one at a time.</a:t>
-            </a:r>
-          </a:p>
-          <a:p>
-            <a:r>
-              <a:t>Temidayo stands in as the listener — "Say you tell me: I reduced the time an internal process took. That gives me a result. Fine." Keep her on camera so it reads as a conversation, not a case study.</a:t>
-            </a:r>
-          </a:p>
-          <a:p>
-            <a:r>
-              <a:t>The example stays generic. No employer, client, system, metric or result.</a:t>
-            </a:r>
-          </a:p>
-          <a:p>
-            <a:r>
-              <a:t>Close on the two questions she hands over: what did this chapter prove you can do, and where else would that be needed?</a:t>
+              <a:t>Timing: approximately 4:23.</a:t>
+            </a:r>
+          </a:p>
+          <a:p>
+            <a:r>
+              <a:t>Slide 6 — Problem / Constraint / Judgment / Outcome.</a:t>
+            </a:r>
+          </a:p>
+          <a:p>
+            <a:r>
+              <a:t>Cue — the line that lands on this slide: “Most of us leave a job carrying a list of tasks and a feeling.”</a:t>
+            </a:r>
+          </a:p>
+          <a:p>
+            <a:r>
+              <a:t>The four prompts reveal one at a time.</a:t>
+            </a:r>
+          </a:p>
+          <a:p>
+            <a:r>
+              <a:t>Judgment is the third prompt and the one that gets left out. “Anybody can describe a project. Almost nobody describes the judgment they used inside it.” Give it room.</a:t>
+            </a:r>
+          </a:p>
+          <a:p>
+            <a:r>
+              <a:t>The precision paragraph is a factual boundary in disguise: claim what you can support, name the measure that moved and not a bigger one, say you led it with your team. Keep it.</a:t>
+            </a:r>
+          </a:p>
+          <a:p>
+            <a:r>
+              <a:t>Reveal states: 5. Reveal frame 9–13 in the build deck.</a:t>
             </a:r>
           </a:p>
         </p:txBody>
@@ -718,27 +743,37 @@
           </a:p>
           <a:p>
             <a:r>
-              <a:t>Timing: approximately 3:57.</a:t>
-            </a:r>
-          </a:p>
-          <a:p>
-            <a:r>
-              <a:t>Reveal the four prompts one at a time.</a:t>
-            </a:r>
-          </a:p>
-          <a:p>
-            <a:r>
-              <a:t>Temidayo stands in as the listener — "Say you tell me: I reduced the time an internal process took. That gives me a result. Fine." Keep her on camera so it reads as a conversation, not a case study.</a:t>
-            </a:r>
-          </a:p>
-          <a:p>
-            <a:r>
-              <a:t>The example stays generic. No employer, client, system, metric or result.</a:t>
-            </a:r>
-          </a:p>
-          <a:p>
-            <a:r>
-              <a:t>Close on the two questions she hands over: what did this chapter prove you can do, and where else would that be needed?</a:t>
+              <a:t>Timing: approximately 4:23.</a:t>
+            </a:r>
+          </a:p>
+          <a:p>
+            <a:r>
+              <a:t>Slide 6 — Problem / Constraint / Judgment / Outcome.</a:t>
+            </a:r>
+          </a:p>
+          <a:p>
+            <a:r>
+              <a:t>Cue — the line that lands on this slide: “Most of us leave a job carrying a list of tasks and a feeling.”</a:t>
+            </a:r>
+          </a:p>
+          <a:p>
+            <a:r>
+              <a:t>The four prompts reveal one at a time.</a:t>
+            </a:r>
+          </a:p>
+          <a:p>
+            <a:r>
+              <a:t>Judgment is the third prompt and the one that gets left out. “Anybody can describe a project. Almost nobody describes the judgment they used inside it.” Give it room.</a:t>
+            </a:r>
+          </a:p>
+          <a:p>
+            <a:r>
+              <a:t>The precision paragraph is a factual boundary in disguise: claim what you can support, name the measure that moved and not a bigger one, say you led it with your team. Keep it.</a:t>
+            </a:r>
+          </a:p>
+          <a:p>
+            <a:r>
+              <a:t>Reveal states: 5. Reveal frame 9–13 in the build deck.</a:t>
             </a:r>
           </a:p>
         </p:txBody>
@@ -813,27 +848,37 @@
           </a:p>
           <a:p>
             <a:r>
-              <a:t>Timing: approximately 3:57.</a:t>
-            </a:r>
-          </a:p>
-          <a:p>
-            <a:r>
-              <a:t>Reveal the four prompts one at a time.</a:t>
-            </a:r>
-          </a:p>
-          <a:p>
-            <a:r>
-              <a:t>Temidayo stands in as the listener — "Say you tell me: I reduced the time an internal process took. That gives me a result. Fine." Keep her on camera so it reads as a conversation, not a case study.</a:t>
-            </a:r>
-          </a:p>
-          <a:p>
-            <a:r>
-              <a:t>The example stays generic. No employer, client, system, metric or result.</a:t>
-            </a:r>
-          </a:p>
-          <a:p>
-            <a:r>
-              <a:t>Close on the two questions she hands over: what did this chapter prove you can do, and where else would that be needed?</a:t>
+              <a:t>Timing: approximately 4:23.</a:t>
+            </a:r>
+          </a:p>
+          <a:p>
+            <a:r>
+              <a:t>Slide 6 — Problem / Constraint / Judgment / Outcome.</a:t>
+            </a:r>
+          </a:p>
+          <a:p>
+            <a:r>
+              <a:t>Cue — the line that lands on this slide: “Most of us leave a job carrying a list of tasks and a feeling.”</a:t>
+            </a:r>
+          </a:p>
+          <a:p>
+            <a:r>
+              <a:t>The four prompts reveal one at a time.</a:t>
+            </a:r>
+          </a:p>
+          <a:p>
+            <a:r>
+              <a:t>Judgment is the third prompt and the one that gets left out. “Anybody can describe a project. Almost nobody describes the judgment they used inside it.” Give it room.</a:t>
+            </a:r>
+          </a:p>
+          <a:p>
+            <a:r>
+              <a:t>The precision paragraph is a factual boundary in disguise: claim what you can support, name the measure that moved and not a bigger one, say you led it with your team. Keep it.</a:t>
+            </a:r>
+          </a:p>
+          <a:p>
+            <a:r>
+              <a:t>Reveal states: 5. Reveal frame 9–13 in the build deck.</a:t>
             </a:r>
           </a:p>
         </p:txBody>
@@ -908,27 +953,37 @@
           </a:p>
           <a:p>
             <a:r>
-              <a:t>Timing: approximately 3:57.</a:t>
-            </a:r>
-          </a:p>
-          <a:p>
-            <a:r>
-              <a:t>Reveal the four prompts one at a time.</a:t>
-            </a:r>
-          </a:p>
-          <a:p>
-            <a:r>
-              <a:t>Temidayo stands in as the listener — "Say you tell me: I reduced the time an internal process took. That gives me a result. Fine." Keep her on camera so it reads as a conversation, not a case study.</a:t>
-            </a:r>
-          </a:p>
-          <a:p>
-            <a:r>
-              <a:t>The example stays generic. No employer, client, system, metric or result.</a:t>
-            </a:r>
-          </a:p>
-          <a:p>
-            <a:r>
-              <a:t>Close on the two questions she hands over: what did this chapter prove you can do, and where else would that be needed?</a:t>
+              <a:t>Timing: approximately 4:23.</a:t>
+            </a:r>
+          </a:p>
+          <a:p>
+            <a:r>
+              <a:t>Slide 6 — Problem / Constraint / Judgment / Outcome.</a:t>
+            </a:r>
+          </a:p>
+          <a:p>
+            <a:r>
+              <a:t>Cue — the line that lands on this slide: “Most of us leave a job carrying a list of tasks and a feeling.”</a:t>
+            </a:r>
+          </a:p>
+          <a:p>
+            <a:r>
+              <a:t>The four prompts reveal one at a time.</a:t>
+            </a:r>
+          </a:p>
+          <a:p>
+            <a:r>
+              <a:t>Judgment is the third prompt and the one that gets left out. “Anybody can describe a project. Almost nobody describes the judgment they used inside it.” Give it room.</a:t>
+            </a:r>
+          </a:p>
+          <a:p>
+            <a:r>
+              <a:t>The precision paragraph is a factual boundary in disguise: claim what you can support, name the measure that moved and not a bigger one, say you led it with your team. Keep it.</a:t>
+            </a:r>
+          </a:p>
+          <a:p>
+            <a:r>
+              <a:t>Reveal states: 5. Reveal frame 9–13 in the build deck.</a:t>
             </a:r>
           </a:p>
         </p:txBody>
@@ -1003,12 +1058,27 @@
           </a:p>
           <a:p>
             <a:r>
-              <a:t>Timing: approximately 5:15, holding to about 5:19.</a:t>
-            </a:r>
-          </a:p>
-          <a:p>
-            <a:r>
-              <a:t>Section card. Hold briefly, then back to presenter.</a:t>
+              <a:t>Timing: approximately 5:37.</a:t>
+            </a:r>
+          </a:p>
+          <a:p>
+            <a:r>
+              <a:t>Slide 7 — 03 Test the Next Move.</a:t>
+            </a:r>
+          </a:p>
+          <a:p>
+            <a:r>
+              <a:t>Cue — the line that lands on this slide: “The third thing is to test the next move.”</a:t>
+            </a:r>
+          </a:p>
+          <a:p>
+            <a:r>
+              <a:t>Section break only.</a:t>
+            </a:r>
+          </a:p>
+          <a:p>
+            <a:r>
+              <a:t>Single state. Reveal frame 14 in the build deck.</a:t>
             </a:r>
           </a:p>
         </p:txBody>
@@ -1083,27 +1153,37 @@
           </a:p>
           <a:p>
             <a:r>
-              <a:t>Timing: approximately 5:19.</a:t>
-            </a:r>
-          </a:p>
-          <a:p>
-            <a:r>
-              <a:t>Reveal the two halves, then the three questions.</a:t>
-            </a:r>
-          </a:p>
-          <a:p>
-            <a:r>
-              <a:t>Both kinds of reset need room. The deliberate one is endorsed — "That can be an excellent decision. I have made it." The trap is the one where the logo changed and the problems did not.</a:t>
-            </a:r>
-          </a:p>
-          <a:p>
-            <a:r>
-              <a:t>"A new employer is not automatically a new direction." Let it land.</a:t>
-            </a:r>
-          </a:p>
-          <a:p>
-            <a:r>
-              <a:t>Nothing here may read as discouragement from leaving.</a:t>
+              <a:t>Timing: approximately 5:40.</a:t>
+            </a:r>
+          </a:p>
+          <a:p>
+            <a:r>
+              <a:t>Slide 8 — Uses Something Proven / Builds Something New.</a:t>
+            </a:r>
+          </a:p>
+          <a:p>
+            <a:r>
+              <a:t>Cue — the line that lands on this slide: “Hold whatever you are considering — a new employer, a new function, working for yourself, or nothing yet — up against two questions.”</a:t>
+            </a:r>
+          </a:p>
+          <a:p>
+            <a:r>
+              <a:t>Two questions, revealed one at a time, then held together.</a:t>
+            </a:r>
+          </a:p>
+          <a:p>
+            <a:r>
+              <a:t>Restarts are not framed as failures anywhere. “Restarts are sometimes exactly right. You just want to choose one, rather than land in one.”</a:t>
+            </a:r>
+          </a:p>
+          <a:p>
+            <a:r>
+              <a:t>The limit paragraph closes the slide: this does not tell the viewer whether to go, and it knows nothing about money, family, health or visas. Do not cut it.</a:t>
+            </a:r>
+          </a:p>
+          <a:p>
+            <a:r>
+              <a:t>Reveal states: 4. Reveal frame 15–18 in the build deck.</a:t>
             </a:r>
           </a:p>
         </p:txBody>
@@ -1178,27 +1258,37 @@
           </a:p>
           <a:p>
             <a:r>
-              <a:t>Timing: approximately 5:19.</a:t>
-            </a:r>
-          </a:p>
-          <a:p>
-            <a:r>
-              <a:t>Reveal the two halves, then the three questions.</a:t>
-            </a:r>
-          </a:p>
-          <a:p>
-            <a:r>
-              <a:t>Both kinds of reset need room. The deliberate one is endorsed — "That can be an excellent decision. I have made it." The trap is the one where the logo changed and the problems did not.</a:t>
-            </a:r>
-          </a:p>
-          <a:p>
-            <a:r>
-              <a:t>"A new employer is not automatically a new direction." Let it land.</a:t>
-            </a:r>
-          </a:p>
-          <a:p>
-            <a:r>
-              <a:t>Nothing here may read as discouragement from leaving.</a:t>
+              <a:t>Timing: approximately 5:40.</a:t>
+            </a:r>
+          </a:p>
+          <a:p>
+            <a:r>
+              <a:t>Slide 8 — Uses Something Proven / Builds Something New.</a:t>
+            </a:r>
+          </a:p>
+          <a:p>
+            <a:r>
+              <a:t>Cue — the line that lands on this slide: “Hold whatever you are considering — a new employer, a new function, working for yourself, or nothing yet — up against two questions.”</a:t>
+            </a:r>
+          </a:p>
+          <a:p>
+            <a:r>
+              <a:t>Two questions, revealed one at a time, then held together.</a:t>
+            </a:r>
+          </a:p>
+          <a:p>
+            <a:r>
+              <a:t>Restarts are not framed as failures anywhere. “Restarts are sometimes exactly right. You just want to choose one, rather than land in one.”</a:t>
+            </a:r>
+          </a:p>
+          <a:p>
+            <a:r>
+              <a:t>The limit paragraph closes the slide: this does not tell the viewer whether to go, and it knows nothing about money, family, health or visas. Do not cut it.</a:t>
+            </a:r>
+          </a:p>
+          <a:p>
+            <a:r>
+              <a:t>Reveal states: 4. Reveal frame 15–18 in the build deck.</a:t>
             </a:r>
           </a:p>
         </p:txBody>
@@ -1273,27 +1363,37 @@
           </a:p>
           <a:p>
             <a:r>
-              <a:t>Timing: approximately 5:19.</a:t>
-            </a:r>
-          </a:p>
-          <a:p>
-            <a:r>
-              <a:t>Reveal the two halves, then the three questions.</a:t>
-            </a:r>
-          </a:p>
-          <a:p>
-            <a:r>
-              <a:t>Both kinds of reset need room. The deliberate one is endorsed — "That can be an excellent decision. I have made it." The trap is the one where the logo changed and the problems did not.</a:t>
-            </a:r>
-          </a:p>
-          <a:p>
-            <a:r>
-              <a:t>"A new employer is not automatically a new direction." Let it land.</a:t>
-            </a:r>
-          </a:p>
-          <a:p>
-            <a:r>
-              <a:t>Nothing here may read as discouragement from leaving.</a:t>
+              <a:t>Timing: approximately 5:40.</a:t>
+            </a:r>
+          </a:p>
+          <a:p>
+            <a:r>
+              <a:t>Slide 8 — Uses Something Proven / Builds Something New.</a:t>
+            </a:r>
+          </a:p>
+          <a:p>
+            <a:r>
+              <a:t>Cue — the line that lands on this slide: “Hold whatever you are considering — a new employer, a new function, working for yourself, or nothing yet — up against two questions.”</a:t>
+            </a:r>
+          </a:p>
+          <a:p>
+            <a:r>
+              <a:t>Two questions, revealed one at a time, then held together.</a:t>
+            </a:r>
+          </a:p>
+          <a:p>
+            <a:r>
+              <a:t>Restarts are not framed as failures anywhere. “Restarts are sometimes exactly right. You just want to choose one, rather than land in one.”</a:t>
+            </a:r>
+          </a:p>
+          <a:p>
+            <a:r>
+              <a:t>The limit paragraph closes the slide: this does not tell the viewer whether to go, and it knows nothing about money, family, health or visas. Do not cut it.</a:t>
+            </a:r>
+          </a:p>
+          <a:p>
+            <a:r>
+              <a:t>Reveal states: 4. Reveal frame 15–18 in the build deck.</a:t>
             </a:r>
           </a:p>
         </p:txBody>
@@ -1368,27 +1468,37 @@
           </a:p>
           <a:p>
             <a:r>
-              <a:t>Timing: approximately 5:19.</a:t>
-            </a:r>
-          </a:p>
-          <a:p>
-            <a:r>
-              <a:t>Reveal the two halves, then the three questions.</a:t>
-            </a:r>
-          </a:p>
-          <a:p>
-            <a:r>
-              <a:t>Both kinds of reset need room. The deliberate one is endorsed — "That can be an excellent decision. I have made it." The trap is the one where the logo changed and the problems did not.</a:t>
-            </a:r>
-          </a:p>
-          <a:p>
-            <a:r>
-              <a:t>"A new employer is not automatically a new direction." Let it land.</a:t>
-            </a:r>
-          </a:p>
-          <a:p>
-            <a:r>
-              <a:t>Nothing here may read as discouragement from leaving.</a:t>
+              <a:t>Timing: approximately 5:40.</a:t>
+            </a:r>
+          </a:p>
+          <a:p>
+            <a:r>
+              <a:t>Slide 8 — Uses Something Proven / Builds Something New.</a:t>
+            </a:r>
+          </a:p>
+          <a:p>
+            <a:r>
+              <a:t>Cue — the line that lands on this slide: “Hold whatever you are considering — a new employer, a new function, working for yourself, or nothing yet — up against two questions.”</a:t>
+            </a:r>
+          </a:p>
+          <a:p>
+            <a:r>
+              <a:t>Two questions, revealed one at a time, then held together.</a:t>
+            </a:r>
+          </a:p>
+          <a:p>
+            <a:r>
+              <a:t>Restarts are not framed as failures anywhere. “Restarts are sometimes exactly right. You just want to choose one, rather than land in one.”</a:t>
+            </a:r>
+          </a:p>
+          <a:p>
+            <a:r>
+              <a:t>The limit paragraph closes the slide: this does not tell the viewer whether to go, and it knows nothing about money, family, health or visas. Do not cut it.</a:t>
+            </a:r>
+          </a:p>
+          <a:p>
+            <a:r>
+              <a:t>Reveal states: 4. Reveal frame 15–18 in the build deck.</a:t>
             </a:r>
           </a:p>
         </p:txBody>
@@ -1463,22 +1573,27 @@
           </a:p>
           <a:p>
             <a:r>
-              <a:t>Timing: approximately 6:33.</a:t>
-            </a:r>
-          </a:p>
-          <a:p>
-            <a:r>
-              <a:t>The consolidation card. Reveal the three checks in order.</a:t>
-            </a:r>
-          </a:p>
-          <a:p>
-            <a:r>
-              <a:t>"In that order. Not because leaving is wrong." That qualifier is load-bearing. Do not cut it.</a:t>
-            </a:r>
-          </a:p>
-          <a:p>
-            <a:r>
-              <a:t>No fourth item, no acronym, no slogan.</a:t>
+              <a:t>Timing: approximately 6:57.</a:t>
+            </a:r>
+          </a:p>
+          <a:p>
+            <a:r>
+              <a:t>Slide 9 — The Three Checks.</a:t>
+            </a:r>
+          </a:p>
+          <a:p>
+            <a:r>
+              <a:t>Cue — the line that lands on this slide: “So those are the three.”</a:t>
+            </a:r>
+          </a:p>
+          <a:p>
+            <a:r>
+              <a:t>The three checks together on screen for the first time. Short slide.</a:t>
+            </a:r>
+          </a:p>
+          <a:p>
+            <a:r>
+              <a:t>Single state. Reveal frame 19 in the build deck.</a:t>
             </a:r>
           </a:p>
         </p:txBody>
@@ -1553,32 +1668,42 @@
           </a:p>
           <a:p>
             <a:r>
-              <a:t>Timing: approximately 0:48.</a:t>
-            </a:r>
-          </a:p>
-          <a:p>
-            <a:r>
-              <a:t>THE SAFETY BOUNDARY COMES FIRST, IN FULL, AND IS NOT NEGOTIABLE:</a:t>
-            </a:r>
-          </a:p>
-          <a:p>
-            <a:r>
-              <a:t>"If your health or your safety is at risk, or you are dealing with harassment or discrimination, nothing in this video is a reason to wait. Get yourself out and get proper support. None of what follows is worth a single week of that."</a:t>
-            </a:r>
-          </a:p>
-          <a:p>
-            <a:r>
-              <a:t>Deliver it plainly and humanely, on camera, with captions. It is not a legal disclaimer and must not be edited to look like one — no fine print, no red alarm graphic, no cutaway.</a:t>
-            </a:r>
-          </a:p>
-          <a:p>
-            <a:r>
-              <a:t>Then the access explanation. The tone is practical, not ominous: afterwards it is not impossible, just harder and slower and dependent on memory.</a:t>
-            </a:r>
-          </a:p>
-          <a:p>
-            <a:r>
-              <a:t>The belonging beat sits here — her own crossings, the relearning, and what she has watched happen to capable people. NO personal job-loss story is established and none is used. Do not let a visual imply one.</a:t>
+              <a:t>Timing: approximately 1:36.</a:t>
+            </a:r>
+          </a:p>
+          <a:p>
+            <a:r>
+              <a:t>Slide 2 — Once You Leave, Access Changes.</a:t>
+            </a:r>
+          </a:p>
+          <a:p>
+            <a:r>
+              <a:t>Cue — the line that lands on this slide: “Here is the practical thing that most of us find out too late.”</a:t>
+            </a:r>
+          </a:p>
+          <a:p>
+            <a:r>
+              <a:t>The access-changes card. Reveal the losses one at a time as she names them.</a:t>
+            </a:r>
+          </a:p>
+          <a:p>
+            <a:r>
+              <a:t>THE BRIDGE: “I once accepted a job offer that an acquisition rescinded before I ever got to start.” One sentence, and that is all. VIDEO 1 OWNS THE FULL STORY. No driving Uber, no Deloitte, no recruiter, no dates in this video.</a:t>
+            </a:r>
+          </a:p>
+          <a:p>
+            <a:r>
+              <a:t>THE BRIDGE MUST NOT BE MISREAD. Temidayo did not quit that role. The very next line — “Your situation is different in one important way. You may be the one doing the choosing.” — must stay adjacent to it. Nothing in the edit may frame the rescinded role as an example of choosing to leave.</a:t>
+            </a:r>
+          </a:p>
+          <a:p>
+            <a:r>
+              <a:t>Calm, not ominous. No countdown, no alarm motif, no exit-door imagery.</a:t>
+            </a:r>
+          </a:p>
+          <a:p>
+            <a:r>
+              <a:t>Single state. Reveal frame 2 in the build deck.</a:t>
             </a:r>
           </a:p>
         </p:txBody>
@@ -1653,22 +1778,37 @@
           </a:p>
           <a:p>
             <a:r>
-              <a:t>Timing: approximately 6:52.</a:t>
-            </a:r>
-          </a:p>
-          <a:p>
-            <a:r>
-              <a:t>Reveal one direction at a time. Keep it provisional — she is not diagnosing the viewer or telling them which one is right.</a:t>
-            </a:r>
-          </a:p>
-          <a:p>
-            <a:r>
-              <a:t>Real life stays in: pay, benefits, caregiving, timing, where you live. The line "anyone who tells you otherwise is not being serious" protects the viewer from tidier advice elsewhere. Keep it.</a:t>
-            </a:r>
-          </a:p>
-          <a:p>
-            <a:r>
-              <a:t>The safety boundary repeats here, briefly: a harmful situation does not need a bridge plan. Do not cut it.</a:t>
+              <a:t>Timing: approximately 7:04.</a:t>
+            </a:r>
+          </a:p>
+          <a:p>
+            <a:r>
+              <a:t>Slide 10 — Decision Reading.</a:t>
+            </a:r>
+          </a:p>
+          <a:p>
+            <a:r>
+              <a:t>Cue — the line that lands on this slide: “And here is how they tend to read.”</a:t>
+            </a:r>
+          </a:p>
+          <a:p>
+            <a:r>
+              <a:t>The three directions reveal one at a time.</a:t>
+            </a:r>
+          </a:p>
+          <a:p>
+            <a:r>
+              <a:t>None of the three reads as “stay”. If an edit makes the third read as a reason to stay, it is the wrong edit — the script says explicitly that it does not mean stay.</a:t>
+            </a:r>
+          </a:p>
+          <a:p>
+            <a:r>
+              <a:t>Calm delivery. This is a reading, not a diagnosis.</a:t>
+            </a:r>
+          </a:p>
+          <a:p>
+            <a:r>
+              <a:t>Reveal states: 3. Reveal frame 20–22 in the build deck.</a:t>
             </a:r>
           </a:p>
         </p:txBody>
@@ -1743,22 +1883,37 @@
           </a:p>
           <a:p>
             <a:r>
-              <a:t>Timing: approximately 6:52.</a:t>
-            </a:r>
-          </a:p>
-          <a:p>
-            <a:r>
-              <a:t>Reveal one direction at a time. Keep it provisional — she is not diagnosing the viewer or telling them which one is right.</a:t>
-            </a:r>
-          </a:p>
-          <a:p>
-            <a:r>
-              <a:t>Real life stays in: pay, benefits, caregiving, timing, where you live. The line "anyone who tells you otherwise is not being serious" protects the viewer from tidier advice elsewhere. Keep it.</a:t>
-            </a:r>
-          </a:p>
-          <a:p>
-            <a:r>
-              <a:t>The safety boundary repeats here, briefly: a harmful situation does not need a bridge plan. Do not cut it.</a:t>
+              <a:t>Timing: approximately 7:04.</a:t>
+            </a:r>
+          </a:p>
+          <a:p>
+            <a:r>
+              <a:t>Slide 10 — Decision Reading.</a:t>
+            </a:r>
+          </a:p>
+          <a:p>
+            <a:r>
+              <a:t>Cue — the line that lands on this slide: “And here is how they tend to read.”</a:t>
+            </a:r>
+          </a:p>
+          <a:p>
+            <a:r>
+              <a:t>The three directions reveal one at a time.</a:t>
+            </a:r>
+          </a:p>
+          <a:p>
+            <a:r>
+              <a:t>None of the three reads as “stay”. If an edit makes the third read as a reason to stay, it is the wrong edit — the script says explicitly that it does not mean stay.</a:t>
+            </a:r>
+          </a:p>
+          <a:p>
+            <a:r>
+              <a:t>Calm delivery. This is a reading, not a diagnosis.</a:t>
+            </a:r>
+          </a:p>
+          <a:p>
+            <a:r>
+              <a:t>Reveal states: 3. Reveal frame 20–22 in the build deck.</a:t>
             </a:r>
           </a:p>
         </p:txBody>
@@ -1833,22 +1988,37 @@
           </a:p>
           <a:p>
             <a:r>
-              <a:t>Timing: approximately 6:52.</a:t>
-            </a:r>
-          </a:p>
-          <a:p>
-            <a:r>
-              <a:t>Reveal one direction at a time. Keep it provisional — she is not diagnosing the viewer or telling them which one is right.</a:t>
-            </a:r>
-          </a:p>
-          <a:p>
-            <a:r>
-              <a:t>Real life stays in: pay, benefits, caregiving, timing, where you live. The line "anyone who tells you otherwise is not being serious" protects the viewer from tidier advice elsewhere. Keep it.</a:t>
-            </a:r>
-          </a:p>
-          <a:p>
-            <a:r>
-              <a:t>The safety boundary repeats here, briefly: a harmful situation does not need a bridge plan. Do not cut it.</a:t>
+              <a:t>Timing: approximately 7:04.</a:t>
+            </a:r>
+          </a:p>
+          <a:p>
+            <a:r>
+              <a:t>Slide 10 — Decision Reading.</a:t>
+            </a:r>
+          </a:p>
+          <a:p>
+            <a:r>
+              <a:t>Cue — the line that lands on this slide: “And here is how they tend to read.”</a:t>
+            </a:r>
+          </a:p>
+          <a:p>
+            <a:r>
+              <a:t>The three directions reveal one at a time.</a:t>
+            </a:r>
+          </a:p>
+          <a:p>
+            <a:r>
+              <a:t>None of the three reads as “stay”. If an edit makes the third read as a reason to stay, it is the wrong edit — the script says explicitly that it does not mean stay.</a:t>
+            </a:r>
+          </a:p>
+          <a:p>
+            <a:r>
+              <a:t>Calm delivery. This is a reading, not a diagnosis.</a:t>
+            </a:r>
+          </a:p>
+          <a:p>
+            <a:r>
+              <a:t>Reveal states: 3. Reveal frame 20–22 in the build deck.</a:t>
             </a:r>
           </a:p>
         </p:txBody>
@@ -1923,22 +2093,37 @@
           </a:p>
           <a:p>
             <a:r>
-              <a:t>Timing: approximately 8:08.</a:t>
-            </a:r>
-          </a:p>
-          <a:p>
-            <a:r>
-              <a:t>Reveal the three questions one at a time. The instruction is concrete: write them down, do not keep them in your head.</a:t>
-            </a:r>
-          </a:p>
-          <a:p>
-            <a:r>
-              <a:t>IDENTITY EXIT, at about 8:42: "I want you to become someone who closes a chapter properly. Who walks out knowing what it built, what evidence stands behind it, and what the next thing needs to use and needs to grow."</a:t>
-            </a:r>
-          </a:p>
-          <a:p>
-            <a:r>
-              <a:t>Then the widening line — do that once and you never arrive at a decision like this empty-handed again. That is the point of the video. If the edit runs long, cut something else.</a:t>
+              <a:t>Timing: approximately 7:45.</a:t>
+            </a:r>
+          </a:p>
+          <a:p>
+            <a:r>
+              <a:t>Slide 11 — Before You Resign.</a:t>
+            </a:r>
+          </a:p>
+          <a:p>
+            <a:r>
+              <a:t>Cue — the line that lands on this slide: “I said at the start that I was not going to try to talk you into staying, and I meant it.”</a:t>
+            </a:r>
+          </a:p>
+          <a:p>
+            <a:r>
+              <a:t>“I said at the start that I was not going to try to talk you into staying, and I meant it.” Return to it deliberately.</a:t>
+            </a:r>
+          </a:p>
+          <a:p>
+            <a:r>
+              <a:t>Then the cost of leaving with only the ending: the last quarter, the last manager, the last conversation.</a:t>
+            </a:r>
+          </a:p>
+          <a:p>
+            <a:r>
+              <a:t>THE IDENTITY EXIT sits at the end of this slide: walking out knowing what the chapter built, what evidence supports it, and what the next move needs to use and to build. It is the point of the video. If the edit runs long, cut something else.</a:t>
+            </a:r>
+          </a:p>
+          <a:p>
+            <a:r>
+              <a:t>Reveal states: 3. Reveal frame 23–25 in the build deck.</a:t>
             </a:r>
           </a:p>
         </p:txBody>
@@ -2013,22 +2198,37 @@
           </a:p>
           <a:p>
             <a:r>
-              <a:t>Timing: approximately 8:08.</a:t>
-            </a:r>
-          </a:p>
-          <a:p>
-            <a:r>
-              <a:t>Reveal the three questions one at a time. The instruction is concrete: write them down, do not keep them in your head.</a:t>
-            </a:r>
-          </a:p>
-          <a:p>
-            <a:r>
-              <a:t>IDENTITY EXIT, at about 8:42: "I want you to become someone who closes a chapter properly. Who walks out knowing what it built, what evidence stands behind it, and what the next thing needs to use and needs to grow."</a:t>
-            </a:r>
-          </a:p>
-          <a:p>
-            <a:r>
-              <a:t>Then the widening line — do that once and you never arrive at a decision like this empty-handed again. That is the point of the video. If the edit runs long, cut something else.</a:t>
+              <a:t>Timing: approximately 7:45.</a:t>
+            </a:r>
+          </a:p>
+          <a:p>
+            <a:r>
+              <a:t>Slide 11 — Before You Resign.</a:t>
+            </a:r>
+          </a:p>
+          <a:p>
+            <a:r>
+              <a:t>Cue — the line that lands on this slide: “I said at the start that I was not going to try to talk you into staying, and I meant it.”</a:t>
+            </a:r>
+          </a:p>
+          <a:p>
+            <a:r>
+              <a:t>“I said at the start that I was not going to try to talk you into staying, and I meant it.” Return to it deliberately.</a:t>
+            </a:r>
+          </a:p>
+          <a:p>
+            <a:r>
+              <a:t>Then the cost of leaving with only the ending: the last quarter, the last manager, the last conversation.</a:t>
+            </a:r>
+          </a:p>
+          <a:p>
+            <a:r>
+              <a:t>THE IDENTITY EXIT sits at the end of this slide: walking out knowing what the chapter built, what evidence supports it, and what the next move needs to use and to build. It is the point of the video. If the edit runs long, cut something else.</a:t>
+            </a:r>
+          </a:p>
+          <a:p>
+            <a:r>
+              <a:t>Reveal states: 3. Reveal frame 23–25 in the build deck.</a:t>
             </a:r>
           </a:p>
         </p:txBody>
@@ -2103,22 +2303,37 @@
           </a:p>
           <a:p>
             <a:r>
-              <a:t>Timing: approximately 8:08.</a:t>
-            </a:r>
-          </a:p>
-          <a:p>
-            <a:r>
-              <a:t>Reveal the three questions one at a time. The instruction is concrete: write them down, do not keep them in your head.</a:t>
-            </a:r>
-          </a:p>
-          <a:p>
-            <a:r>
-              <a:t>IDENTITY EXIT, at about 8:42: "I want you to become someone who closes a chapter properly. Who walks out knowing what it built, what evidence stands behind it, and what the next thing needs to use and needs to grow."</a:t>
-            </a:r>
-          </a:p>
-          <a:p>
-            <a:r>
-              <a:t>Then the widening line — do that once and you never arrive at a decision like this empty-handed again. That is the point of the video. If the edit runs long, cut something else.</a:t>
+              <a:t>Timing: approximately 7:45.</a:t>
+            </a:r>
+          </a:p>
+          <a:p>
+            <a:r>
+              <a:t>Slide 11 — Before You Resign.</a:t>
+            </a:r>
+          </a:p>
+          <a:p>
+            <a:r>
+              <a:t>Cue — the line that lands on this slide: “I said at the start that I was not going to try to talk you into staying, and I meant it.”</a:t>
+            </a:r>
+          </a:p>
+          <a:p>
+            <a:r>
+              <a:t>“I said at the start that I was not going to try to talk you into staying, and I meant it.” Return to it deliberately.</a:t>
+            </a:r>
+          </a:p>
+          <a:p>
+            <a:r>
+              <a:t>Then the cost of leaving with only the ending: the last quarter, the last manager, the last conversation.</a:t>
+            </a:r>
+          </a:p>
+          <a:p>
+            <a:r>
+              <a:t>THE IDENTITY EXIT sits at the end of this slide: walking out knowing what the chapter built, what evidence supports it, and what the next move needs to use and to build. It is the point of the video. If the edit runs long, cut something else.</a:t>
+            </a:r>
+          </a:p>
+          <a:p>
+            <a:r>
+              <a:t>Reveal states: 3. Reveal frame 23–25 in the build deck.</a:t>
             </a:r>
           </a:p>
         </p:txBody>
@@ -2193,27 +2408,32 @@
           </a:p>
           <a:p>
             <a:r>
-              <a:t>Timing: approximately 9:11.</a:t>
-            </a:r>
-          </a:p>
-          <a:p>
-            <a:r>
-              <a:t>Calm and brief. The only invitation in the video, and it is the Career Decision Evidence Check — not the Field Kit, not Keep the Proof, not the Starter.</a:t>
-            </a:r>
-          </a:p>
-          <a:p>
-            <a:r>
-              <a:t>It lands AFTER the identity bridge. Keep that order.</a:t>
-            </a:r>
-          </a:p>
-          <a:p>
-            <a:r>
-              <a:t>Note the phrasing: "that is exactly what I made the Career Decision Evidence Check for." Offered, not announced.</a:t>
-            </a:r>
-          </a:p>
-          <a:p>
-            <a:r>
-              <a:t>CTA PRODUCTION GATE: SATISFIED. The page is live. One signed-out production check is still required before upload or scheduling.</a:t>
+              <a:t>Timing: approximately 8:40.</a:t>
+            </a:r>
+          </a:p>
+          <a:p>
+            <a:r>
+              <a:t>Slide 12 — Career Decision Evidence Check.</a:t>
+            </a:r>
+          </a:p>
+          <a:p>
+            <a:r>
+              <a:t>Cue — the line that lands on this slide: “If you want help doing this properly, I made the Career Decision Evidence Check.”</a:t>
+            </a:r>
+          </a:p>
+          <a:p>
+            <a:r>
+              <a:t>One CTA in this video. Do not add the Field Kit, Keep the Proof or the Career Evidence Starter.</a:t>
+            </a:r>
+          </a:p>
+          <a:p>
+            <a:r>
+              <a:t>CTA production gate: SATISFIED. The page is live. Retain one signed-out link check in the upload SOP before this video is scheduled.</a:t>
+            </a:r>
+          </a:p>
+          <a:p>
+            <a:r>
+              <a:t>Single state. Reveal frame 26 in the build deck.</a:t>
             </a:r>
           </a:p>
         </p:txBody>
@@ -2288,27 +2508,37 @@
           </a:p>
           <a:p>
             <a:r>
-              <a:t>Timing: approximately 9:35 to the end, about 9:58.</a:t>
-            </a:r>
-          </a:p>
-          <a:p>
-            <a:r>
-              <a:t>The card reads "How to Change Jobs Without Starting Your Career Over", the locked Video 1 title, matching what Temidayo says.</a:t>
-            </a:r>
-          </a:p>
-          <a:p>
-            <a:r>
-              <a:t>Closing line: "Leaving one job should not cost you everything the work built in you." Stay on her for it.</a:t>
-            </a:r>
-          </a:p>
-          <a:p>
-            <a:r>
-              <a:t>Do not summarize the video again.</a:t>
-            </a:r>
-          </a:p>
-          <a:p>
-            <a:r>
-              <a:t>The right side of the frame is left open for the YouTube linked-video end-screen element. Hold the final frame for at least 12 seconds.</a:t>
+              <a:t>Timing: approximately 8:59.</a:t>
+            </a:r>
+          </a:p>
+          <a:p>
+            <a:r>
+              <a:t>Slide 13 — Watch Next.</a:t>
+            </a:r>
+          </a:p>
+          <a:p>
+            <a:r>
+              <a:t>Cue — the line that lands on this slide: “And whichever way this goes, there is one more thing worth watching.”</a:t>
+            </a:r>
+          </a:p>
+          <a:p>
+            <a:r>
+              <a:t>The Video 1 route. Card reads “How to Change Jobs Without Starting Your Career Over”.</a:t>
+            </a:r>
+          </a:p>
+          <a:p>
+            <a:r>
+              <a:t>The reference here — “what happened when a role I had accepted disappeared before I started it” — is the only forward pointer to the full story. Do not extend it.</a:t>
+            </a:r>
+          </a:p>
+          <a:p>
+            <a:r>
+              <a:t>Sign off clean on the last two lines.</a:t>
+            </a:r>
+          </a:p>
+          <a:p>
+            <a:r>
+              <a:t>Single state. Reveal frame 27 in the build deck.</a:t>
             </a:r>
           </a:p>
         </p:txBody>
@@ -2383,17 +2613,27 @@
           </a:p>
           <a:p>
             <a:r>
-              <a:t>Timing: approximately 2:35, holding to about 2:38.</a:t>
-            </a:r>
-          </a:p>
-          <a:p>
-            <a:r>
-              <a:t>Section card. Hold briefly, then back to presenter.</a:t>
-            </a:r>
-          </a:p>
-          <a:p>
-            <a:r>
-              <a:t>The framework does not arrive until here, at over two and a half minutes. That is deliberate.</a:t>
+              <a:t>Timing: approximately 2:41.</a:t>
+            </a:r>
+          </a:p>
+          <a:p>
+            <a:r>
+              <a:t>Slide 3 — 01 Preserve the Evidence.</a:t>
+            </a:r>
+          </a:p>
+          <a:p>
+            <a:r>
+              <a:t>Cue — the line that lands on this slide: “So the first thing is to preserve the evidence.”</a:t>
+            </a:r>
+          </a:p>
+          <a:p>
+            <a:r>
+              <a:t>Section break only. The three checks do not arrive until about 2:41.</a:t>
+            </a:r>
+          </a:p>
+          <a:p>
+            <a:r>
+              <a:t>Single state. Reveal frame 3 in the build deck.</a:t>
             </a:r>
           </a:p>
         </p:txBody>
@@ -2468,32 +2708,42 @@
           </a:p>
           <a:p>
             <a:r>
-              <a:t>Timing: approximately 2:38.</a:t>
-            </a:r>
-          </a:p>
-          <a:p>
-            <a:r>
-              <a:t>Reveal what is yours to keep, then the boundary column.</a:t>
-            </a:r>
-          </a:p>
-          <a:p>
-            <a:r>
-              <a:t>Say the boundary plainly. Confidential information, customer data, employee data, proprietary documents, anything the employer owns — it stays with the employer.</a:t>
-            </a:r>
-          </a:p>
-          <a:p>
-            <a:r>
-              <a:t>The rule to say out loud: if you do not have the right to keep it, do not take it.</a:t>
-            </a:r>
-          </a:p>
-          <a:p>
-            <a:r>
-              <a:t>Then the four lines: where it started, what you decided or influenced, what changed, what permitted evidence supports it.</a:t>
-            </a:r>
-          </a:p>
-          <a:p>
-            <a:r>
-              <a:t>Close on why this one is first: do it while you can still check.</a:t>
+              <a:t>Timing: approximately 2:45.</a:t>
+            </a:r>
+          </a:p>
+          <a:p>
+            <a:r>
+              <a:t>Slide 4 — What to Keep / What Not to Take.</a:t>
+            </a:r>
+          </a:p>
+          <a:p>
+            <a:r>
+              <a:t>Cue — the line that lands on this slide: “And I have to be precise here, because this is the part that gets misread in both directions.”</a:t>
+            </a:r>
+          </a:p>
+          <a:p>
+            <a:r>
+              <a:t>Two columns: what is yours to keep beside what is not. Reveal the keep side first, then the do-not-take side.</a:t>
+            </a:r>
+          </a:p>
+          <a:p>
+            <a:r>
+              <a:t>EVIDENCE BOUNDARY — the reason this slide exists. No client material, no employee data, no internal documents, decks, code, models or files, nothing confidential or proprietary, nothing the contract covers. “If you have to think about whether a document is yours, it is not yours.”</a:t>
+            </a:r>
+          </a:p>
+          <a:p>
+            <a:r>
+              <a:t>Nothing in the visual treatment may suggest copying, exporting or removing employer material.</a:t>
+            </a:r>
+          </a:p>
+          <a:p>
+            <a:r>
+              <a:t>The second half is the other error: concluding there is nothing to keep. Keep both halves.</a:t>
+            </a:r>
+          </a:p>
+          <a:p>
+            <a:r>
+              <a:t>Reveal states: 4. Reveal frame 4–7 in the build deck.</a:t>
             </a:r>
           </a:p>
         </p:txBody>
@@ -2568,32 +2818,42 @@
           </a:p>
           <a:p>
             <a:r>
-              <a:t>Timing: approximately 2:38.</a:t>
-            </a:r>
-          </a:p>
-          <a:p>
-            <a:r>
-              <a:t>Reveal what is yours to keep, then the boundary column.</a:t>
-            </a:r>
-          </a:p>
-          <a:p>
-            <a:r>
-              <a:t>Say the boundary plainly. Confidential information, customer data, employee data, proprietary documents, anything the employer owns — it stays with the employer.</a:t>
-            </a:r>
-          </a:p>
-          <a:p>
-            <a:r>
-              <a:t>The rule to say out loud: if you do not have the right to keep it, do not take it.</a:t>
-            </a:r>
-          </a:p>
-          <a:p>
-            <a:r>
-              <a:t>Then the four lines: where it started, what you decided or influenced, what changed, what permitted evidence supports it.</a:t>
-            </a:r>
-          </a:p>
-          <a:p>
-            <a:r>
-              <a:t>Close on why this one is first: do it while you can still check.</a:t>
+              <a:t>Timing: approximately 2:45.</a:t>
+            </a:r>
+          </a:p>
+          <a:p>
+            <a:r>
+              <a:t>Slide 4 — What to Keep / What Not to Take.</a:t>
+            </a:r>
+          </a:p>
+          <a:p>
+            <a:r>
+              <a:t>Cue — the line that lands on this slide: “And I have to be precise here, because this is the part that gets misread in both directions.”</a:t>
+            </a:r>
+          </a:p>
+          <a:p>
+            <a:r>
+              <a:t>Two columns: what is yours to keep beside what is not. Reveal the keep side first, then the do-not-take side.</a:t>
+            </a:r>
+          </a:p>
+          <a:p>
+            <a:r>
+              <a:t>EVIDENCE BOUNDARY — the reason this slide exists. No client material, no employee data, no internal documents, decks, code, models or files, nothing confidential or proprietary, nothing the contract covers. “If you have to think about whether a document is yours, it is not yours.”</a:t>
+            </a:r>
+          </a:p>
+          <a:p>
+            <a:r>
+              <a:t>Nothing in the visual treatment may suggest copying, exporting or removing employer material.</a:t>
+            </a:r>
+          </a:p>
+          <a:p>
+            <a:r>
+              <a:t>The second half is the other error: concluding there is nothing to keep. Keep both halves.</a:t>
+            </a:r>
+          </a:p>
+          <a:p>
+            <a:r>
+              <a:t>Reveal states: 4. Reveal frame 4–7 in the build deck.</a:t>
             </a:r>
           </a:p>
         </p:txBody>
@@ -2668,32 +2928,42 @@
           </a:p>
           <a:p>
             <a:r>
-              <a:t>Timing: approximately 2:38.</a:t>
-            </a:r>
-          </a:p>
-          <a:p>
-            <a:r>
-              <a:t>Reveal what is yours to keep, then the boundary column.</a:t>
-            </a:r>
-          </a:p>
-          <a:p>
-            <a:r>
-              <a:t>Say the boundary plainly. Confidential information, customer data, employee data, proprietary documents, anything the employer owns — it stays with the employer.</a:t>
-            </a:r>
-          </a:p>
-          <a:p>
-            <a:r>
-              <a:t>The rule to say out loud: if you do not have the right to keep it, do not take it.</a:t>
-            </a:r>
-          </a:p>
-          <a:p>
-            <a:r>
-              <a:t>Then the four lines: where it started, what you decided or influenced, what changed, what permitted evidence supports it.</a:t>
-            </a:r>
-          </a:p>
-          <a:p>
-            <a:r>
-              <a:t>Close on why this one is first: do it while you can still check.</a:t>
+              <a:t>Timing: approximately 2:45.</a:t>
+            </a:r>
+          </a:p>
+          <a:p>
+            <a:r>
+              <a:t>Slide 4 — What to Keep / What Not to Take.</a:t>
+            </a:r>
+          </a:p>
+          <a:p>
+            <a:r>
+              <a:t>Cue — the line that lands on this slide: “And I have to be precise here, because this is the part that gets misread in both directions.”</a:t>
+            </a:r>
+          </a:p>
+          <a:p>
+            <a:r>
+              <a:t>Two columns: what is yours to keep beside what is not. Reveal the keep side first, then the do-not-take side.</a:t>
+            </a:r>
+          </a:p>
+          <a:p>
+            <a:r>
+              <a:t>EVIDENCE BOUNDARY — the reason this slide exists. No client material, no employee data, no internal documents, decks, code, models or files, nothing confidential or proprietary, nothing the contract covers. “If you have to think about whether a document is yours, it is not yours.”</a:t>
+            </a:r>
+          </a:p>
+          <a:p>
+            <a:r>
+              <a:t>Nothing in the visual treatment may suggest copying, exporting or removing employer material.</a:t>
+            </a:r>
+          </a:p>
+          <a:p>
+            <a:r>
+              <a:t>The second half is the other error: concluding there is nothing to keep. Keep both halves.</a:t>
+            </a:r>
+          </a:p>
+          <a:p>
+            <a:r>
+              <a:t>Reveal states: 4. Reveal frame 4–7 in the build deck.</a:t>
             </a:r>
           </a:p>
         </p:txBody>
@@ -2768,32 +3038,42 @@
           </a:p>
           <a:p>
             <a:r>
-              <a:t>Timing: approximately 2:38.</a:t>
-            </a:r>
-          </a:p>
-          <a:p>
-            <a:r>
-              <a:t>Reveal what is yours to keep, then the boundary column.</a:t>
-            </a:r>
-          </a:p>
-          <a:p>
-            <a:r>
-              <a:t>Say the boundary plainly. Confidential information, customer data, employee data, proprietary documents, anything the employer owns — it stays with the employer.</a:t>
-            </a:r>
-          </a:p>
-          <a:p>
-            <a:r>
-              <a:t>The rule to say out loud: if you do not have the right to keep it, do not take it.</a:t>
-            </a:r>
-          </a:p>
-          <a:p>
-            <a:r>
-              <a:t>Then the four lines: where it started, what you decided or influenced, what changed, what permitted evidence supports it.</a:t>
-            </a:r>
-          </a:p>
-          <a:p>
-            <a:r>
-              <a:t>Close on why this one is first: do it while you can still check.</a:t>
+              <a:t>Timing: approximately 2:45.</a:t>
+            </a:r>
+          </a:p>
+          <a:p>
+            <a:r>
+              <a:t>Slide 4 — What to Keep / What Not to Take.</a:t>
+            </a:r>
+          </a:p>
+          <a:p>
+            <a:r>
+              <a:t>Cue — the line that lands on this slide: “And I have to be precise here, because this is the part that gets misread in both directions.”</a:t>
+            </a:r>
+          </a:p>
+          <a:p>
+            <a:r>
+              <a:t>Two columns: what is yours to keep beside what is not. Reveal the keep side first, then the do-not-take side.</a:t>
+            </a:r>
+          </a:p>
+          <a:p>
+            <a:r>
+              <a:t>EVIDENCE BOUNDARY — the reason this slide exists. No client material, no employee data, no internal documents, decks, code, models or files, nothing confidential or proprietary, nothing the contract covers. “If you have to think about whether a document is yours, it is not yours.”</a:t>
+            </a:r>
+          </a:p>
+          <a:p>
+            <a:r>
+              <a:t>Nothing in the visual treatment may suggest copying, exporting or removing employer material.</a:t>
+            </a:r>
+          </a:p>
+          <a:p>
+            <a:r>
+              <a:t>The second half is the other error: concluding there is nothing to keep. Keep both halves.</a:t>
+            </a:r>
+          </a:p>
+          <a:p>
+            <a:r>
+              <a:t>Reveal states: 4. Reveal frame 4–7 in the build deck.</a:t>
             </a:r>
           </a:p>
         </p:txBody>
@@ -2868,12 +3148,27 @@
           </a:p>
           <a:p>
             <a:r>
-              <a:t>Timing: approximately 3:52, holding to about 3:57.</a:t>
-            </a:r>
-          </a:p>
-          <a:p>
-            <a:r>
-              <a:t>Section card. Hold briefly, then back to presenter.</a:t>
+              <a:t>Timing: approximately 4:19.</a:t>
+            </a:r>
+          </a:p>
+          <a:p>
+            <a:r>
+              <a:t>Slide 5 — 02 Name What Your Work Built.</a:t>
+            </a:r>
+          </a:p>
+          <a:p>
+            <a:r>
+              <a:t>Cue — the line that lands on this slide: “The second thing is to name what your work built.”</a:t>
+            </a:r>
+          </a:p>
+          <a:p>
+            <a:r>
+              <a:t>Section break only.</a:t>
+            </a:r>
+          </a:p>
+          <a:p>
+            <a:r>
+              <a:t>Single state. Reveal frame 8 in the build deck.</a:t>
             </a:r>
           </a:p>
         </p:txBody>
@@ -2948,27 +3243,37 @@
           </a:p>
           <a:p>
             <a:r>
-              <a:t>Timing: approximately 3:57.</a:t>
-            </a:r>
-          </a:p>
-          <a:p>
-            <a:r>
-              <a:t>Reveal the four prompts one at a time.</a:t>
-            </a:r>
-          </a:p>
-          <a:p>
-            <a:r>
-              <a:t>Temidayo stands in as the listener — "Say you tell me: I reduced the time an internal process took. That gives me a result. Fine." Keep her on camera so it reads as a conversation, not a case study.</a:t>
-            </a:r>
-          </a:p>
-          <a:p>
-            <a:r>
-              <a:t>The example stays generic. No employer, client, system, metric or result.</a:t>
-            </a:r>
-          </a:p>
-          <a:p>
-            <a:r>
-              <a:t>Close on the two questions she hands over: what did this chapter prove you can do, and where else would that be needed?</a:t>
+              <a:t>Timing: approximately 4:23.</a:t>
+            </a:r>
+          </a:p>
+          <a:p>
+            <a:r>
+              <a:t>Slide 6 — Problem / Constraint / Judgment / Outcome.</a:t>
+            </a:r>
+          </a:p>
+          <a:p>
+            <a:r>
+              <a:t>Cue — the line that lands on this slide: “Most of us leave a job carrying a list of tasks and a feeling.”</a:t>
+            </a:r>
+          </a:p>
+          <a:p>
+            <a:r>
+              <a:t>The four prompts reveal one at a time.</a:t>
+            </a:r>
+          </a:p>
+          <a:p>
+            <a:r>
+              <a:t>Judgment is the third prompt and the one that gets left out. “Anybody can describe a project. Almost nobody describes the judgment they used inside it.” Give it room.</a:t>
+            </a:r>
+          </a:p>
+          <a:p>
+            <a:r>
+              <a:t>The precision paragraph is a factual boundary in disguise: claim what you can support, name the measure that moved and not a bigger one, say you led it with your team. Keep it.</a:t>
+            </a:r>
+          </a:p>
+          <a:p>
+            <a:r>
+              <a:t>Reveal states: 5. Reveal frame 9–13 in the build deck.</a:t>
             </a:r>
           </a:p>
         </p:txBody>

--- a/deliverables/video-3-slides/out/Video-3-Reveal-Builds_v1.1.pptx
+++ b/deliverables/video-3-slides/out/Video-3-Reveal-Builds_v1.1.pptx
@@ -533,7 +533,7 @@
           </a:p>
           <a:p>
             <a:r>
-              <a:t>Timing: approximately 0:36.</a:t>
+              <a:t>Timing: approximately 0:39.</a:t>
             </a:r>
           </a:p>
           <a:p>
@@ -638,7 +638,7 @@
           </a:p>
           <a:p>
             <a:r>
-              <a:t>Timing: approximately 4:23.</a:t>
+              <a:t>Timing: approximately 4:24.</a:t>
             </a:r>
           </a:p>
           <a:p>
@@ -743,7 +743,7 @@
           </a:p>
           <a:p>
             <a:r>
-              <a:t>Timing: approximately 4:23.</a:t>
+              <a:t>Timing: approximately 4:24.</a:t>
             </a:r>
           </a:p>
           <a:p>
@@ -848,7 +848,7 @@
           </a:p>
           <a:p>
             <a:r>
-              <a:t>Timing: approximately 4:23.</a:t>
+              <a:t>Timing: approximately 4:24.</a:t>
             </a:r>
           </a:p>
           <a:p>
@@ -953,7 +953,7 @@
           </a:p>
           <a:p>
             <a:r>
-              <a:t>Timing: approximately 4:23.</a:t>
+              <a:t>Timing: approximately 4:24.</a:t>
             </a:r>
           </a:p>
           <a:p>
@@ -1153,7 +1153,7 @@
           </a:p>
           <a:p>
             <a:r>
-              <a:t>Timing: approximately 5:40.</a:t>
+              <a:t>Timing: approximately 5:41.</a:t>
             </a:r>
           </a:p>
           <a:p>
@@ -1258,7 +1258,7 @@
           </a:p>
           <a:p>
             <a:r>
-              <a:t>Timing: approximately 5:40.</a:t>
+              <a:t>Timing: approximately 5:41.</a:t>
             </a:r>
           </a:p>
           <a:p>
@@ -1363,7 +1363,7 @@
           </a:p>
           <a:p>
             <a:r>
-              <a:t>Timing: approximately 5:40.</a:t>
+              <a:t>Timing: approximately 5:41.</a:t>
             </a:r>
           </a:p>
           <a:p>
@@ -1468,7 +1468,7 @@
           </a:p>
           <a:p>
             <a:r>
-              <a:t>Timing: approximately 5:40.</a:t>
+              <a:t>Timing: approximately 5:41.</a:t>
             </a:r>
           </a:p>
           <a:p>
@@ -1668,7 +1668,7 @@
           </a:p>
           <a:p>
             <a:r>
-              <a:t>Timing: approximately 1:36.</a:t>
+              <a:t>Timing: approximately 1:38.</a:t>
             </a:r>
           </a:p>
           <a:p>
@@ -2508,7 +2508,7 @@
           </a:p>
           <a:p>
             <a:r>
-              <a:t>Timing: approximately 8:59.</a:t>
+              <a:t>Timing: approximately 9:00.</a:t>
             </a:r>
           </a:p>
           <a:p>
@@ -2613,7 +2613,7 @@
           </a:p>
           <a:p>
             <a:r>
-              <a:t>Timing: approximately 2:41.</a:t>
+              <a:t>Timing: approximately 2:42.</a:t>
             </a:r>
           </a:p>
           <a:p>
@@ -3243,7 +3243,7 @@
           </a:p>
           <a:p>
             <a:r>
-              <a:t>Timing: approximately 4:23.</a:t>
+              <a:t>Timing: approximately 4:24.</a:t>
             </a:r>
           </a:p>
           <a:p>
